--- a/deep_learning/object_detection/1-object-detection.pptx
+++ b/deep_learning/object_detection/1-object-detection.pptx
@@ -5,21 +5,22 @@
     <p:sldMasterId id="2147483648" r:id="rId1"/>
   </p:sldMasterIdLst>
   <p:notesMasterIdLst>
-    <p:notesMasterId r:id="rId11"/>
+    <p:notesMasterId r:id="rId12"/>
   </p:notesMasterIdLst>
   <p:handoutMasterIdLst>
-    <p:handoutMasterId r:id="rId12"/>
+    <p:handoutMasterId r:id="rId13"/>
   </p:handoutMasterIdLst>
   <p:sldIdLst>
     <p:sldId id="276" r:id="rId2"/>
     <p:sldId id="257" r:id="rId3"/>
-    <p:sldId id="277" r:id="rId4"/>
-    <p:sldId id="281" r:id="rId5"/>
-    <p:sldId id="282" r:id="rId6"/>
-    <p:sldId id="283" r:id="rId7"/>
-    <p:sldId id="278" r:id="rId8"/>
-    <p:sldId id="280" r:id="rId9"/>
-    <p:sldId id="275" r:id="rId10"/>
+    <p:sldId id="284" r:id="rId4"/>
+    <p:sldId id="277" r:id="rId5"/>
+    <p:sldId id="281" r:id="rId6"/>
+    <p:sldId id="282" r:id="rId7"/>
+    <p:sldId id="283" r:id="rId8"/>
+    <p:sldId id="278" r:id="rId9"/>
+    <p:sldId id="280" r:id="rId10"/>
+    <p:sldId id="275" r:id="rId11"/>
   </p:sldIdLst>
   <p:sldSz cx="12192000" cy="6858000"/>
   <p:notesSz cx="6858000" cy="9144000"/>
@@ -4042,1568 +4043,7 @@
 </p:sld>
 </file>
 
-<file path=ppt/slides/slide2.xml><?xml version="1.0" encoding="utf-8"?>
-<p:sld xmlns:a="http://schemas.openxmlformats.org/drawingml/2006/main" xmlns:r="http://schemas.openxmlformats.org/officeDocument/2006/relationships" xmlns:p="http://schemas.openxmlformats.org/presentationml/2006/main">
-  <p:cSld>
-    <p:spTree>
-      <p:nvGrpSpPr>
-        <p:cNvPr id="1" name=""/>
-        <p:cNvGrpSpPr/>
-        <p:nvPr/>
-      </p:nvGrpSpPr>
-      <p:grpSpPr>
-        <a:xfrm>
-          <a:off x="0" y="0"/>
-          <a:ext cx="0" cy="0"/>
-          <a:chOff x="0" y="0"/>
-          <a:chExt cx="0" cy="0"/>
-        </a:xfrm>
-      </p:grpSpPr>
-      <p:sp>
-        <p:nvSpPr>
-          <p:cNvPr id="4" name="TextBox 3">
-            <a:extLst>
-              <a:ext uri="{FF2B5EF4-FFF2-40B4-BE49-F238E27FC236}">
-                <a16:creationId xmlns:a16="http://schemas.microsoft.com/office/drawing/2014/main" id="{06500EF0-C39A-3394-E2DA-9C20DA34E655}"/>
-              </a:ext>
-            </a:extLst>
-          </p:cNvPr>
-          <p:cNvSpPr txBox="1"/>
-          <p:nvPr/>
-        </p:nvSpPr>
-        <p:spPr>
-          <a:xfrm>
-            <a:off x="260604" y="73813"/>
-            <a:ext cx="6190488" cy="4154984"/>
-          </a:xfrm>
-          <a:prstGeom prst="rect">
-            <a:avLst/>
-          </a:prstGeom>
-          <a:noFill/>
-        </p:spPr>
-        <p:txBody>
-          <a:bodyPr wrap="square">
-            <a:spAutoFit/>
-          </a:bodyPr>
-          <a:lstStyle/>
-          <a:p>
-            <a:r>
-              <a:rPr lang="en-US" sz="2400" dirty="0">
-                <a:solidFill>
-                  <a:schemeClr val="accent6">
-                    <a:lumMod val="60000"/>
-                    <a:lumOff val="40000"/>
-                  </a:schemeClr>
-                </a:solidFill>
-              </a:rPr>
-              <a:t>Object detection model evolution</a:t>
-            </a:r>
-          </a:p>
-          <a:p>
-            <a:endParaRPr lang="en-US" sz="2400" dirty="0">
-              <a:solidFill>
-                <a:schemeClr val="accent6">
-                  <a:lumMod val="60000"/>
-                  <a:lumOff val="40000"/>
-                </a:schemeClr>
-              </a:solidFill>
-            </a:endParaRPr>
-          </a:p>
-          <a:p>
-            <a:pPr marL="457200" indent="-457200">
-              <a:buFont typeface="+mj-lt"/>
-              <a:buAutoNum type="arabicPeriod"/>
-            </a:pPr>
-            <a:r>
-              <a:rPr lang="en-US" sz="2400" dirty="0">
-                <a:solidFill>
-                  <a:schemeClr val="accent6">
-                    <a:lumMod val="60000"/>
-                    <a:lumOff val="40000"/>
-                  </a:schemeClr>
-                </a:solidFill>
-              </a:rPr>
-              <a:t>R-CNN</a:t>
-            </a:r>
-          </a:p>
-          <a:p>
-            <a:pPr marL="457200" indent="-457200">
-              <a:buFont typeface="+mj-lt"/>
-              <a:buAutoNum type="arabicPeriod"/>
-            </a:pPr>
-            <a:endParaRPr lang="en-US" sz="2400" dirty="0">
-              <a:solidFill>
-                <a:schemeClr val="accent6">
-                  <a:lumMod val="60000"/>
-                  <a:lumOff val="40000"/>
-                </a:schemeClr>
-              </a:solidFill>
-            </a:endParaRPr>
-          </a:p>
-          <a:p>
-            <a:pPr marL="457200" indent="-457200">
-              <a:buFont typeface="+mj-lt"/>
-              <a:buAutoNum type="arabicPeriod"/>
-            </a:pPr>
-            <a:r>
-              <a:rPr lang="en-US" sz="2400" dirty="0">
-                <a:solidFill>
-                  <a:schemeClr val="accent6">
-                    <a:lumMod val="60000"/>
-                    <a:lumOff val="40000"/>
-                  </a:schemeClr>
-                </a:solidFill>
-              </a:rPr>
-              <a:t>Fast R-CNN (optimization idea)</a:t>
-            </a:r>
-          </a:p>
-          <a:p>
-            <a:pPr marL="457200" indent="-457200">
-              <a:buFont typeface="+mj-lt"/>
-              <a:buAutoNum type="arabicPeriod"/>
-            </a:pPr>
-            <a:endParaRPr lang="en-US" sz="2400" dirty="0">
-              <a:solidFill>
-                <a:schemeClr val="accent6">
-                  <a:lumMod val="60000"/>
-                  <a:lumOff val="40000"/>
-                </a:schemeClr>
-              </a:solidFill>
-            </a:endParaRPr>
-          </a:p>
-          <a:p>
-            <a:pPr marL="457200" indent="-457200">
-              <a:buFont typeface="+mj-lt"/>
-              <a:buAutoNum type="arabicPeriod"/>
-            </a:pPr>
-            <a:r>
-              <a:rPr lang="en-US" sz="2400" dirty="0">
-                <a:solidFill>
-                  <a:schemeClr val="accent6">
-                    <a:lumMod val="60000"/>
-                    <a:lumOff val="40000"/>
-                  </a:schemeClr>
-                </a:solidFill>
-              </a:rPr>
-              <a:t>Faster R-CNN (modern region proposal)</a:t>
-            </a:r>
-          </a:p>
-          <a:p>
-            <a:pPr marL="457200" indent="-457200">
-              <a:buFont typeface="+mj-lt"/>
-              <a:buAutoNum type="arabicPeriod"/>
-            </a:pPr>
-            <a:endParaRPr lang="en-US" sz="2400" dirty="0">
-              <a:solidFill>
-                <a:schemeClr val="accent6">
-                  <a:lumMod val="60000"/>
-                  <a:lumOff val="40000"/>
-                </a:schemeClr>
-              </a:solidFill>
-            </a:endParaRPr>
-          </a:p>
-          <a:p>
-            <a:pPr marL="457200" indent="-457200">
-              <a:buFont typeface="+mj-lt"/>
-              <a:buAutoNum type="arabicPeriod"/>
-            </a:pPr>
-            <a:r>
-              <a:rPr lang="en-US" sz="2400" dirty="0">
-                <a:solidFill>
-                  <a:schemeClr val="accent6">
-                    <a:lumMod val="60000"/>
-                    <a:lumOff val="40000"/>
-                  </a:schemeClr>
-                </a:solidFill>
-              </a:rPr>
-              <a:t>SSD</a:t>
-            </a:r>
-          </a:p>
-          <a:p>
-            <a:pPr marL="457200" indent="-457200">
-              <a:buFont typeface="+mj-lt"/>
-              <a:buAutoNum type="arabicPeriod"/>
-            </a:pPr>
-            <a:endParaRPr lang="en-US" sz="2400" dirty="0">
-              <a:solidFill>
-                <a:schemeClr val="accent6">
-                  <a:lumMod val="60000"/>
-                  <a:lumOff val="40000"/>
-                </a:schemeClr>
-              </a:solidFill>
-            </a:endParaRPr>
-          </a:p>
-          <a:p>
-            <a:pPr marL="457200" indent="-457200">
-              <a:buFont typeface="+mj-lt"/>
-              <a:buAutoNum type="arabicPeriod"/>
-            </a:pPr>
-            <a:r>
-              <a:rPr lang="en-US" sz="2400" dirty="0">
-                <a:solidFill>
-                  <a:schemeClr val="accent6">
-                    <a:lumMod val="60000"/>
-                    <a:lumOff val="40000"/>
-                  </a:schemeClr>
-                </a:solidFill>
-              </a:rPr>
-              <a:t>YOLO (industry - today )</a:t>
-            </a:r>
-          </a:p>
-        </p:txBody>
-      </p:sp>
-    </p:spTree>
-    <p:extLst>
-      <p:ext uri="{BB962C8B-B14F-4D97-AF65-F5344CB8AC3E}">
-        <p14:creationId xmlns:p14="http://schemas.microsoft.com/office/powerpoint/2010/main" val="4221193315"/>
-      </p:ext>
-    </p:extLst>
-  </p:cSld>
-  <p:clrMapOvr>
-    <a:masterClrMapping/>
-  </p:clrMapOvr>
-</p:sld>
-</file>
-
-<file path=ppt/slides/slide3.xml><?xml version="1.0" encoding="utf-8"?>
-<p:sld xmlns:a="http://schemas.openxmlformats.org/drawingml/2006/main" xmlns:r="http://schemas.openxmlformats.org/officeDocument/2006/relationships" xmlns:p="http://schemas.openxmlformats.org/presentationml/2006/main">
-  <p:cSld>
-    <p:spTree>
-      <p:nvGrpSpPr>
-        <p:cNvPr id="1" name="">
-          <a:extLst>
-            <a:ext uri="{FF2B5EF4-FFF2-40B4-BE49-F238E27FC236}">
-              <a16:creationId xmlns:a16="http://schemas.microsoft.com/office/drawing/2014/main" id="{97FB748C-E8C3-5751-AA07-D39AB1E8D1FE}"/>
-            </a:ext>
-          </a:extLst>
-        </p:cNvPr>
-        <p:cNvGrpSpPr/>
-        <p:nvPr/>
-      </p:nvGrpSpPr>
-      <p:grpSpPr>
-        <a:xfrm>
-          <a:off x="0" y="0"/>
-          <a:ext cx="0" cy="0"/>
-          <a:chOff x="0" y="0"/>
-          <a:chExt cx="0" cy="0"/>
-        </a:xfrm>
-      </p:grpSpPr>
-      <p:sp>
-        <p:nvSpPr>
-          <p:cNvPr id="4" name="TextBox 3">
-            <a:extLst>
-              <a:ext uri="{FF2B5EF4-FFF2-40B4-BE49-F238E27FC236}">
-                <a16:creationId xmlns:a16="http://schemas.microsoft.com/office/drawing/2014/main" id="{9A852C26-EA7F-1AB3-08FC-DEA360215B74}"/>
-              </a:ext>
-            </a:extLst>
-          </p:cNvPr>
-          <p:cNvSpPr txBox="1"/>
-          <p:nvPr/>
-        </p:nvSpPr>
-        <p:spPr>
-          <a:xfrm>
-            <a:off x="260604" y="73813"/>
-            <a:ext cx="8453628" cy="2677656"/>
-          </a:xfrm>
-          <a:prstGeom prst="rect">
-            <a:avLst/>
-          </a:prstGeom>
-          <a:noFill/>
-        </p:spPr>
-        <p:txBody>
-          <a:bodyPr wrap="square">
-            <a:spAutoFit/>
-          </a:bodyPr>
-          <a:lstStyle/>
-          <a:p>
-            <a:r>
-              <a:rPr lang="en-US" sz="2400" b="1" dirty="0">
-                <a:solidFill>
-                  <a:schemeClr val="accent6">
-                    <a:lumMod val="60000"/>
-                    <a:lumOff val="40000"/>
-                  </a:schemeClr>
-                </a:solidFill>
-              </a:rPr>
-              <a:t>1. R-CNN</a:t>
-            </a:r>
-          </a:p>
-          <a:p>
-            <a:r>
-              <a:rPr lang="en-US" sz="2400" dirty="0">
-                <a:solidFill>
-                  <a:schemeClr val="accent6">
-                    <a:lumMod val="60000"/>
-                    <a:lumOff val="40000"/>
-                  </a:schemeClr>
-                </a:solidFill>
-              </a:rPr>
-              <a:t>General Idea:</a:t>
-            </a:r>
-          </a:p>
-          <a:p>
-            <a:pPr lvl="1"/>
-            <a:r>
-              <a:rPr lang="en-US" sz="2400" dirty="0">
-                <a:solidFill>
-                  <a:schemeClr val="accent6">
-                    <a:lumMod val="60000"/>
-                    <a:lumOff val="40000"/>
-                  </a:schemeClr>
-                </a:solidFill>
-              </a:rPr>
-              <a:t>Step 1: Generate region proposals (possible object areas) </a:t>
-            </a:r>
-          </a:p>
-          <a:p>
-            <a:pPr lvl="1"/>
-            <a:r>
-              <a:rPr lang="en-US" sz="2400" dirty="0">
-                <a:solidFill>
-                  <a:schemeClr val="accent6">
-                    <a:lumMod val="60000"/>
-                    <a:lumOff val="40000"/>
-                  </a:schemeClr>
-                </a:solidFill>
-              </a:rPr>
-              <a:t>Step 2: Run CNN on each region </a:t>
-            </a:r>
-          </a:p>
-          <a:p>
-            <a:pPr lvl="1"/>
-            <a:r>
-              <a:rPr lang="en-US" sz="2400" dirty="0">
-                <a:solidFill>
-                  <a:schemeClr val="accent6">
-                    <a:lumMod val="60000"/>
-                    <a:lumOff val="40000"/>
-                  </a:schemeClr>
-                </a:solidFill>
-              </a:rPr>
-              <a:t>Step 3: Classify + bounding box </a:t>
-            </a:r>
-          </a:p>
-          <a:p>
-            <a:endParaRPr lang="en-US" sz="2400" dirty="0">
-              <a:solidFill>
-                <a:schemeClr val="accent6">
-                  <a:lumMod val="60000"/>
-                  <a:lumOff val="40000"/>
-                </a:schemeClr>
-              </a:solidFill>
-            </a:endParaRPr>
-          </a:p>
-          <a:p>
-            <a:r>
-              <a:rPr lang="en-US" sz="2400" dirty="0">
-                <a:solidFill>
-                  <a:schemeClr val="accent6">
-                    <a:lumMod val="60000"/>
-                    <a:lumOff val="40000"/>
-                  </a:schemeClr>
-                </a:solidFill>
-              </a:rPr>
-              <a:t>Easy analogy: “crop image → classify each crop” </a:t>
-            </a:r>
-          </a:p>
-        </p:txBody>
-      </p:sp>
-    </p:spTree>
-    <p:extLst>
-      <p:ext uri="{BB962C8B-B14F-4D97-AF65-F5344CB8AC3E}">
-        <p14:creationId xmlns:p14="http://schemas.microsoft.com/office/powerpoint/2010/main" val="150551120"/>
-      </p:ext>
-    </p:extLst>
-  </p:cSld>
-  <p:clrMapOvr>
-    <a:masterClrMapping/>
-  </p:clrMapOvr>
-</p:sld>
-</file>
-
-<file path=ppt/slides/slide4.xml><?xml version="1.0" encoding="utf-8"?>
-<p:sld xmlns:a="http://schemas.openxmlformats.org/drawingml/2006/main" xmlns:r="http://schemas.openxmlformats.org/officeDocument/2006/relationships" xmlns:p="http://schemas.openxmlformats.org/presentationml/2006/main">
-  <p:cSld>
-    <p:spTree>
-      <p:nvGrpSpPr>
-        <p:cNvPr id="1" name="">
-          <a:extLst>
-            <a:ext uri="{FF2B5EF4-FFF2-40B4-BE49-F238E27FC236}">
-              <a16:creationId xmlns:a16="http://schemas.microsoft.com/office/drawing/2014/main" id="{4EB134C4-1AEC-806C-2574-8BD95B75A5FE}"/>
-            </a:ext>
-          </a:extLst>
-        </p:cNvPr>
-        <p:cNvGrpSpPr/>
-        <p:nvPr/>
-      </p:nvGrpSpPr>
-      <p:grpSpPr>
-        <a:xfrm>
-          <a:off x="0" y="0"/>
-          <a:ext cx="0" cy="0"/>
-          <a:chOff x="0" y="0"/>
-          <a:chExt cx="0" cy="0"/>
-        </a:xfrm>
-      </p:grpSpPr>
-      <p:sp>
-        <p:nvSpPr>
-          <p:cNvPr id="4" name="TextBox 3">
-            <a:extLst>
-              <a:ext uri="{FF2B5EF4-FFF2-40B4-BE49-F238E27FC236}">
-                <a16:creationId xmlns:a16="http://schemas.microsoft.com/office/drawing/2014/main" id="{F8FF5086-151F-F18D-35C2-8570A269475D}"/>
-              </a:ext>
-            </a:extLst>
-          </p:cNvPr>
-          <p:cNvSpPr txBox="1"/>
-          <p:nvPr/>
-        </p:nvSpPr>
-        <p:spPr>
-          <a:xfrm>
-            <a:off x="260604" y="73813"/>
-            <a:ext cx="8453628" cy="461665"/>
-          </a:xfrm>
-          <a:prstGeom prst="rect">
-            <a:avLst/>
-          </a:prstGeom>
-          <a:noFill/>
-        </p:spPr>
-        <p:txBody>
-          <a:bodyPr wrap="square">
-            <a:spAutoFit/>
-          </a:bodyPr>
-          <a:lstStyle/>
-          <a:p>
-            <a:r>
-              <a:rPr lang="en-US" sz="2400" b="1" dirty="0">
-                <a:solidFill>
-                  <a:schemeClr val="accent6">
-                    <a:lumMod val="60000"/>
-                    <a:lumOff val="40000"/>
-                  </a:schemeClr>
-                </a:solidFill>
-              </a:rPr>
-              <a:t>1. R-CNN (In detail)</a:t>
-            </a:r>
-          </a:p>
-        </p:txBody>
-      </p:sp>
-      <p:sp>
-        <p:nvSpPr>
-          <p:cNvPr id="3" name="TextBox 2">
-            <a:extLst>
-              <a:ext uri="{FF2B5EF4-FFF2-40B4-BE49-F238E27FC236}">
-                <a16:creationId xmlns:a16="http://schemas.microsoft.com/office/drawing/2014/main" id="{4DA06BA5-5280-E0AE-7937-C0ADEA67D2F6}"/>
-              </a:ext>
-            </a:extLst>
-          </p:cNvPr>
-          <p:cNvSpPr txBox="1"/>
-          <p:nvPr/>
-        </p:nvSpPr>
-        <p:spPr>
-          <a:xfrm>
-            <a:off x="260604" y="711446"/>
-            <a:ext cx="5399532" cy="5632311"/>
-          </a:xfrm>
-          <a:prstGeom prst="rect">
-            <a:avLst/>
-          </a:prstGeom>
-          <a:noFill/>
-        </p:spPr>
-        <p:txBody>
-          <a:bodyPr wrap="square">
-            <a:spAutoFit/>
-          </a:bodyPr>
-          <a:lstStyle/>
-          <a:p>
-            <a:pPr marL="342900" indent="-342900">
-              <a:buAutoNum type="arabicPeriod"/>
-            </a:pPr>
-            <a:r>
-              <a:rPr lang="en-US" sz="2400" dirty="0">
-                <a:solidFill>
-                  <a:schemeClr val="accent6">
-                    <a:lumMod val="60000"/>
-                    <a:lumOff val="40000"/>
-                  </a:schemeClr>
-                </a:solidFill>
-              </a:rPr>
-              <a:t>Region Proposal:</a:t>
-            </a:r>
-          </a:p>
-          <a:p>
-            <a:r>
-              <a:rPr lang="en-US" sz="2400" dirty="0">
-                <a:solidFill>
-                  <a:schemeClr val="accent6">
-                    <a:lumMod val="60000"/>
-                    <a:lumOff val="40000"/>
-                  </a:schemeClr>
-                </a:solidFill>
-              </a:rPr>
-              <a:t>It generates ~2000 </a:t>
-            </a:r>
-            <a:r>
-              <a:rPr lang="en-US" sz="2400" b="1" dirty="0">
-                <a:solidFill>
-                  <a:schemeClr val="accent6">
-                    <a:lumMod val="60000"/>
-                    <a:lumOff val="40000"/>
-                  </a:schemeClr>
-                </a:solidFill>
-              </a:rPr>
-              <a:t>class-independent region proposals</a:t>
-            </a:r>
-            <a:r>
-              <a:rPr lang="en-US" sz="2400" dirty="0">
-                <a:solidFill>
-                  <a:schemeClr val="accent6">
-                    <a:lumMod val="60000"/>
-                    <a:lumOff val="40000"/>
-                  </a:schemeClr>
-                </a:solidFill>
-              </a:rPr>
-              <a:t> using Selective Search (i.e., it doesn’t know what the object is yet).</a:t>
-            </a:r>
-          </a:p>
-          <a:p>
-            <a:endParaRPr lang="en-US" sz="2400" dirty="0">
-              <a:solidFill>
-                <a:schemeClr val="accent6">
-                  <a:lumMod val="60000"/>
-                  <a:lumOff val="40000"/>
-                </a:schemeClr>
-              </a:solidFill>
-            </a:endParaRPr>
-          </a:p>
-          <a:p>
-            <a:r>
-              <a:rPr lang="en-US" sz="2400" dirty="0">
-                <a:solidFill>
-                  <a:schemeClr val="accent6">
-                    <a:lumMod val="60000"/>
-                    <a:lumOff val="40000"/>
-                  </a:schemeClr>
-                </a:solidFill>
-              </a:rPr>
-              <a:t>2. Feature Extraction </a:t>
-            </a:r>
-          </a:p>
-          <a:p>
-            <a:r>
-              <a:rPr lang="en-US" sz="2400" dirty="0">
-                <a:solidFill>
-                  <a:schemeClr val="accent6">
-                    <a:lumMod val="60000"/>
-                    <a:lumOff val="40000"/>
-                  </a:schemeClr>
-                </a:solidFill>
-              </a:rPr>
-              <a:t>Each region is warped (resized) to a fixed size and passed through a pre-trained CNN (like </a:t>
-            </a:r>
-            <a:r>
-              <a:rPr lang="en-US" sz="2400" dirty="0" err="1">
-                <a:solidFill>
-                  <a:schemeClr val="accent6">
-                    <a:lumMod val="60000"/>
-                    <a:lumOff val="40000"/>
-                  </a:schemeClr>
-                </a:solidFill>
-              </a:rPr>
-              <a:t>AlexNet</a:t>
-            </a:r>
-            <a:r>
-              <a:rPr lang="en-US" sz="2400" dirty="0">
-                <a:solidFill>
-                  <a:schemeClr val="accent6">
-                    <a:lumMod val="60000"/>
-                    <a:lumOff val="40000"/>
-                  </a:schemeClr>
-                </a:solidFill>
-              </a:rPr>
-              <a:t> / VGG) to extract features.</a:t>
-            </a:r>
-          </a:p>
-          <a:p>
-            <a:endParaRPr lang="en-US" sz="2400" dirty="0">
-              <a:solidFill>
-                <a:schemeClr val="accent6">
-                  <a:lumMod val="60000"/>
-                  <a:lumOff val="40000"/>
-                </a:schemeClr>
-              </a:solidFill>
-            </a:endParaRPr>
-          </a:p>
-          <a:p>
-            <a:r>
-              <a:rPr lang="en-US" sz="2400" dirty="0">
-                <a:solidFill>
-                  <a:schemeClr val="accent6">
-                    <a:lumMod val="60000"/>
-                    <a:lumOff val="40000"/>
-                  </a:schemeClr>
-                </a:solidFill>
-              </a:rPr>
-              <a:t>3. Classification</a:t>
-            </a:r>
-          </a:p>
-          <a:p>
-            <a:r>
-              <a:rPr lang="en-US" sz="2400" dirty="0">
-                <a:solidFill>
-                  <a:schemeClr val="accent6">
-                    <a:lumMod val="60000"/>
-                    <a:lumOff val="40000"/>
-                  </a:schemeClr>
-                </a:solidFill>
-              </a:rPr>
-              <a:t>A separate SVM classifier is trained per class, using CNN features.</a:t>
-            </a:r>
-          </a:p>
-        </p:txBody>
-      </p:sp>
-      <p:pic>
-        <p:nvPicPr>
-          <p:cNvPr id="6" name="Picture 5">
-            <a:extLst>
-              <a:ext uri="{FF2B5EF4-FFF2-40B4-BE49-F238E27FC236}">
-                <a16:creationId xmlns:a16="http://schemas.microsoft.com/office/drawing/2014/main" id="{B351EC89-128D-1850-55A6-447F386FD23C}"/>
-              </a:ext>
-            </a:extLst>
-          </p:cNvPr>
-          <p:cNvPicPr>
-            <a:picLocks noChangeAspect="1"/>
-          </p:cNvPicPr>
-          <p:nvPr/>
-        </p:nvPicPr>
-        <p:blipFill>
-          <a:blip r:embed="rId2"/>
-          <a:stretch>
-            <a:fillRect/>
-          </a:stretch>
-        </p:blipFill>
-        <p:spPr>
-          <a:xfrm>
-            <a:off x="5922243" y="1261871"/>
-            <a:ext cx="6164869" cy="4716125"/>
-          </a:xfrm>
-          <a:prstGeom prst="rect">
-            <a:avLst/>
-          </a:prstGeom>
-        </p:spPr>
-      </p:pic>
-      <p:sp>
-        <p:nvSpPr>
-          <p:cNvPr id="7" name="TextBox 6">
-            <a:extLst>
-              <a:ext uri="{FF2B5EF4-FFF2-40B4-BE49-F238E27FC236}">
-                <a16:creationId xmlns:a16="http://schemas.microsoft.com/office/drawing/2014/main" id="{A46C39E6-ACFC-5049-16A8-449F28180981}"/>
-              </a:ext>
-            </a:extLst>
-          </p:cNvPr>
-          <p:cNvSpPr txBox="1"/>
-          <p:nvPr/>
-        </p:nvSpPr>
-        <p:spPr>
-          <a:xfrm>
-            <a:off x="8330184" y="880004"/>
-            <a:ext cx="1732975" cy="369332"/>
-          </a:xfrm>
-          <a:prstGeom prst="rect">
-            <a:avLst/>
-          </a:prstGeom>
-          <a:noFill/>
-        </p:spPr>
-        <p:txBody>
-          <a:bodyPr wrap="none" rtlCol="0">
-            <a:spAutoFit/>
-          </a:bodyPr>
-          <a:lstStyle/>
-          <a:p>
-            <a:r>
-              <a:rPr lang="en-US" dirty="0">
-                <a:solidFill>
-                  <a:schemeClr val="accent6">
-                    <a:lumMod val="60000"/>
-                    <a:lumOff val="40000"/>
-                  </a:schemeClr>
-                </a:solidFill>
-              </a:rPr>
-              <a:t>Source: Medium</a:t>
-            </a:r>
-          </a:p>
-        </p:txBody>
-      </p:sp>
-    </p:spTree>
-    <p:extLst>
-      <p:ext uri="{BB962C8B-B14F-4D97-AF65-F5344CB8AC3E}">
-        <p14:creationId xmlns:p14="http://schemas.microsoft.com/office/powerpoint/2010/main" val="408669186"/>
-      </p:ext>
-    </p:extLst>
-  </p:cSld>
-  <p:clrMapOvr>
-    <a:masterClrMapping/>
-  </p:clrMapOvr>
-</p:sld>
-</file>
-
-<file path=ppt/slides/slide5.xml><?xml version="1.0" encoding="utf-8"?>
-<p:sld xmlns:a="http://schemas.openxmlformats.org/drawingml/2006/main" xmlns:r="http://schemas.openxmlformats.org/officeDocument/2006/relationships" xmlns:p="http://schemas.openxmlformats.org/presentationml/2006/main">
-  <p:cSld>
-    <p:spTree>
-      <p:nvGrpSpPr>
-        <p:cNvPr id="1" name="">
-          <a:extLst>
-            <a:ext uri="{FF2B5EF4-FFF2-40B4-BE49-F238E27FC236}">
-              <a16:creationId xmlns:a16="http://schemas.microsoft.com/office/drawing/2014/main" id="{D2F25460-3835-0D98-3A67-D155F6B08CB5}"/>
-            </a:ext>
-          </a:extLst>
-        </p:cNvPr>
-        <p:cNvGrpSpPr/>
-        <p:nvPr/>
-      </p:nvGrpSpPr>
-      <p:grpSpPr>
-        <a:xfrm>
-          <a:off x="0" y="0"/>
-          <a:ext cx="0" cy="0"/>
-          <a:chOff x="0" y="0"/>
-          <a:chExt cx="0" cy="0"/>
-        </a:xfrm>
-      </p:grpSpPr>
-      <p:sp>
-        <p:nvSpPr>
-          <p:cNvPr id="4" name="TextBox 3">
-            <a:extLst>
-              <a:ext uri="{FF2B5EF4-FFF2-40B4-BE49-F238E27FC236}">
-                <a16:creationId xmlns:a16="http://schemas.microsoft.com/office/drawing/2014/main" id="{35BF4D56-4612-F0D4-5244-C31E3E9FDB85}"/>
-              </a:ext>
-            </a:extLst>
-          </p:cNvPr>
-          <p:cNvSpPr txBox="1"/>
-          <p:nvPr/>
-        </p:nvSpPr>
-        <p:spPr>
-          <a:xfrm>
-            <a:off x="260604" y="73813"/>
-            <a:ext cx="8453628" cy="461665"/>
-          </a:xfrm>
-          <a:prstGeom prst="rect">
-            <a:avLst/>
-          </a:prstGeom>
-          <a:noFill/>
-        </p:spPr>
-        <p:txBody>
-          <a:bodyPr wrap="square">
-            <a:spAutoFit/>
-          </a:bodyPr>
-          <a:lstStyle/>
-          <a:p>
-            <a:r>
-              <a:rPr lang="en-US" sz="2400" b="1" dirty="0">
-                <a:solidFill>
-                  <a:schemeClr val="accent6">
-                    <a:lumMod val="60000"/>
-                    <a:lumOff val="40000"/>
-                  </a:schemeClr>
-                </a:solidFill>
-              </a:rPr>
-              <a:t>1. R-CNN (In detail)</a:t>
-            </a:r>
-          </a:p>
-        </p:txBody>
-      </p:sp>
-      <p:sp>
-        <p:nvSpPr>
-          <p:cNvPr id="3" name="TextBox 2">
-            <a:extLst>
-              <a:ext uri="{FF2B5EF4-FFF2-40B4-BE49-F238E27FC236}">
-                <a16:creationId xmlns:a16="http://schemas.microsoft.com/office/drawing/2014/main" id="{21EECCC7-4B70-53D3-739F-0DAA2FF7E661}"/>
-              </a:ext>
-            </a:extLst>
-          </p:cNvPr>
-          <p:cNvSpPr txBox="1"/>
-          <p:nvPr/>
-        </p:nvSpPr>
-        <p:spPr>
-          <a:xfrm>
-            <a:off x="104888" y="535478"/>
-            <a:ext cx="6185916" cy="3416320"/>
-          </a:xfrm>
-          <a:prstGeom prst="rect">
-            <a:avLst/>
-          </a:prstGeom>
-          <a:noFill/>
-        </p:spPr>
-        <p:txBody>
-          <a:bodyPr wrap="square">
-            <a:spAutoFit/>
-          </a:bodyPr>
-          <a:lstStyle/>
-          <a:p>
-            <a:r>
-              <a:rPr lang="en-US" sz="2400" dirty="0">
-                <a:solidFill>
-                  <a:schemeClr val="accent6">
-                    <a:lumMod val="60000"/>
-                    <a:lumOff val="40000"/>
-                  </a:schemeClr>
-                </a:solidFill>
-              </a:rPr>
-              <a:t>4. Bounding Box Regression</a:t>
-            </a:r>
-          </a:p>
-          <a:p>
-            <a:r>
-              <a:rPr lang="en-US" sz="2400" dirty="0">
-                <a:solidFill>
-                  <a:schemeClr val="accent6">
-                    <a:lumMod val="60000"/>
-                    <a:lumOff val="40000"/>
-                  </a:schemeClr>
-                </a:solidFill>
-              </a:rPr>
-              <a:t>A class-specific bounding box regressor refines the coordinates.</a:t>
-            </a:r>
-          </a:p>
-          <a:p>
-            <a:endParaRPr lang="en-US" sz="2400" dirty="0">
-              <a:solidFill>
-                <a:schemeClr val="accent6">
-                  <a:lumMod val="60000"/>
-                  <a:lumOff val="40000"/>
-                </a:schemeClr>
-              </a:solidFill>
-            </a:endParaRPr>
-          </a:p>
-          <a:p>
-            <a:endParaRPr lang="en-US" sz="2400" dirty="0">
-              <a:solidFill>
-                <a:schemeClr val="accent6">
-                  <a:lumMod val="60000"/>
-                  <a:lumOff val="40000"/>
-                </a:schemeClr>
-              </a:solidFill>
-            </a:endParaRPr>
-          </a:p>
-          <a:p>
-            <a:endParaRPr lang="en-US" sz="2400" dirty="0">
-              <a:solidFill>
-                <a:schemeClr val="accent6">
-                  <a:lumMod val="60000"/>
-                  <a:lumOff val="40000"/>
-                </a:schemeClr>
-              </a:solidFill>
-            </a:endParaRPr>
-          </a:p>
-          <a:p>
-            <a:r>
-              <a:rPr lang="en-US" sz="2400" dirty="0">
-                <a:solidFill>
-                  <a:schemeClr val="accent6">
-                    <a:lumMod val="60000"/>
-                    <a:lumOff val="40000"/>
-                  </a:schemeClr>
-                </a:solidFill>
-              </a:rPr>
-              <a:t>5. Non-Maximum Suppression</a:t>
-            </a:r>
-          </a:p>
-          <a:p>
-            <a:r>
-              <a:rPr lang="en-US" sz="2400" dirty="0">
-                <a:solidFill>
-                  <a:schemeClr val="accent6">
-                    <a:lumMod val="60000"/>
-                    <a:lumOff val="40000"/>
-                  </a:schemeClr>
-                </a:solidFill>
-              </a:rPr>
-              <a:t>Keeps the box with highest confidence and removes overlapping ones.</a:t>
-            </a:r>
-          </a:p>
-        </p:txBody>
-      </p:sp>
-      <p:pic>
-        <p:nvPicPr>
-          <p:cNvPr id="6" name="Picture 5">
-            <a:extLst>
-              <a:ext uri="{FF2B5EF4-FFF2-40B4-BE49-F238E27FC236}">
-                <a16:creationId xmlns:a16="http://schemas.microsoft.com/office/drawing/2014/main" id="{AEF37E3D-FD9A-A725-13FD-758625C0CAE7}"/>
-              </a:ext>
-            </a:extLst>
-          </p:cNvPr>
-          <p:cNvPicPr>
-            <a:picLocks noChangeAspect="1"/>
-          </p:cNvPicPr>
-          <p:nvPr/>
-        </p:nvPicPr>
-        <p:blipFill>
-          <a:blip r:embed="rId2"/>
-          <a:stretch>
-            <a:fillRect/>
-          </a:stretch>
-        </p:blipFill>
-        <p:spPr>
-          <a:xfrm>
-            <a:off x="5922243" y="1261871"/>
-            <a:ext cx="6164869" cy="4716125"/>
-          </a:xfrm>
-          <a:prstGeom prst="rect">
-            <a:avLst/>
-          </a:prstGeom>
-        </p:spPr>
-      </p:pic>
-      <p:sp>
-        <p:nvSpPr>
-          <p:cNvPr id="7" name="TextBox 6">
-            <a:extLst>
-              <a:ext uri="{FF2B5EF4-FFF2-40B4-BE49-F238E27FC236}">
-                <a16:creationId xmlns:a16="http://schemas.microsoft.com/office/drawing/2014/main" id="{C79BE874-8623-DDCB-1914-E5EF159BB8F6}"/>
-              </a:ext>
-            </a:extLst>
-          </p:cNvPr>
-          <p:cNvSpPr txBox="1"/>
-          <p:nvPr/>
-        </p:nvSpPr>
-        <p:spPr>
-          <a:xfrm>
-            <a:off x="8330184" y="880004"/>
-            <a:ext cx="1732975" cy="369332"/>
-          </a:xfrm>
-          <a:prstGeom prst="rect">
-            <a:avLst/>
-          </a:prstGeom>
-          <a:noFill/>
-        </p:spPr>
-        <p:txBody>
-          <a:bodyPr wrap="none" rtlCol="0">
-            <a:spAutoFit/>
-          </a:bodyPr>
-          <a:lstStyle/>
-          <a:p>
-            <a:r>
-              <a:rPr lang="en-US" dirty="0">
-                <a:solidFill>
-                  <a:schemeClr val="accent6">
-                    <a:lumMod val="60000"/>
-                    <a:lumOff val="40000"/>
-                  </a:schemeClr>
-                </a:solidFill>
-              </a:rPr>
-              <a:t>Source: Medium</a:t>
-            </a:r>
-          </a:p>
-        </p:txBody>
-      </p:sp>
-    </p:spTree>
-    <p:extLst>
-      <p:ext uri="{BB962C8B-B14F-4D97-AF65-F5344CB8AC3E}">
-        <p14:creationId xmlns:p14="http://schemas.microsoft.com/office/powerpoint/2010/main" val="2502768764"/>
-      </p:ext>
-    </p:extLst>
-  </p:cSld>
-  <p:clrMapOvr>
-    <a:masterClrMapping/>
-  </p:clrMapOvr>
-</p:sld>
-</file>
-
-<file path=ppt/slides/slide6.xml><?xml version="1.0" encoding="utf-8"?>
-<p:sld xmlns:a="http://schemas.openxmlformats.org/drawingml/2006/main" xmlns:r="http://schemas.openxmlformats.org/officeDocument/2006/relationships" xmlns:p="http://schemas.openxmlformats.org/presentationml/2006/main">
-  <p:cSld>
-    <p:spTree>
-      <p:nvGrpSpPr>
-        <p:cNvPr id="1" name="">
-          <a:extLst>
-            <a:ext uri="{FF2B5EF4-FFF2-40B4-BE49-F238E27FC236}">
-              <a16:creationId xmlns:a16="http://schemas.microsoft.com/office/drawing/2014/main" id="{909E779B-A5BD-86EA-527E-80F44EC3CF96}"/>
-            </a:ext>
-          </a:extLst>
-        </p:cNvPr>
-        <p:cNvGrpSpPr/>
-        <p:nvPr/>
-      </p:nvGrpSpPr>
-      <p:grpSpPr>
-        <a:xfrm>
-          <a:off x="0" y="0"/>
-          <a:ext cx="0" cy="0"/>
-          <a:chOff x="0" y="0"/>
-          <a:chExt cx="0" cy="0"/>
-        </a:xfrm>
-      </p:grpSpPr>
-      <p:sp>
-        <p:nvSpPr>
-          <p:cNvPr id="4" name="TextBox 3">
-            <a:extLst>
-              <a:ext uri="{FF2B5EF4-FFF2-40B4-BE49-F238E27FC236}">
-                <a16:creationId xmlns:a16="http://schemas.microsoft.com/office/drawing/2014/main" id="{857A28FD-43DA-AABF-D553-91ED407D24A8}"/>
-              </a:ext>
-            </a:extLst>
-          </p:cNvPr>
-          <p:cNvSpPr txBox="1"/>
-          <p:nvPr/>
-        </p:nvSpPr>
-        <p:spPr>
-          <a:xfrm>
-            <a:off x="260604" y="73813"/>
-            <a:ext cx="8453628" cy="461665"/>
-          </a:xfrm>
-          <a:prstGeom prst="rect">
-            <a:avLst/>
-          </a:prstGeom>
-          <a:noFill/>
-        </p:spPr>
-        <p:txBody>
-          <a:bodyPr wrap="square">
-            <a:spAutoFit/>
-          </a:bodyPr>
-          <a:lstStyle/>
-          <a:p>
-            <a:r>
-              <a:rPr lang="en-US" sz="2400" b="1" dirty="0">
-                <a:solidFill>
-                  <a:schemeClr val="accent6">
-                    <a:lumMod val="60000"/>
-                    <a:lumOff val="40000"/>
-                  </a:schemeClr>
-                </a:solidFill>
-              </a:rPr>
-              <a:t>1. R-CNN (In detail)</a:t>
-            </a:r>
-          </a:p>
-        </p:txBody>
-      </p:sp>
-      <p:sp>
-        <p:nvSpPr>
-          <p:cNvPr id="5" name="TextBox 4">
-            <a:extLst>
-              <a:ext uri="{FF2B5EF4-FFF2-40B4-BE49-F238E27FC236}">
-                <a16:creationId xmlns:a16="http://schemas.microsoft.com/office/drawing/2014/main" id="{89281FAC-587C-579D-B3F0-403C4B45CAEF}"/>
-              </a:ext>
-            </a:extLst>
-          </p:cNvPr>
-          <p:cNvSpPr txBox="1"/>
-          <p:nvPr/>
-        </p:nvSpPr>
-        <p:spPr>
-          <a:xfrm>
-            <a:off x="397764" y="1366903"/>
-            <a:ext cx="5783580" cy="2677656"/>
-          </a:xfrm>
-          <a:prstGeom prst="rect">
-            <a:avLst/>
-          </a:prstGeom>
-          <a:noFill/>
-        </p:spPr>
-        <p:txBody>
-          <a:bodyPr wrap="square">
-            <a:spAutoFit/>
-          </a:bodyPr>
-          <a:lstStyle/>
-          <a:p>
-            <a:pPr>
-              <a:buNone/>
-            </a:pPr>
-            <a:r>
-              <a:rPr lang="en-US" sz="2400" b="1" dirty="0">
-                <a:solidFill>
-                  <a:schemeClr val="accent6">
-                    <a:lumMod val="60000"/>
-                    <a:lumOff val="40000"/>
-                  </a:schemeClr>
-                </a:solidFill>
-              </a:rPr>
-              <a:t>Big drawback of R-CNN:</a:t>
-            </a:r>
-            <a:endParaRPr lang="en-US" sz="2400" dirty="0">
-              <a:solidFill>
-                <a:schemeClr val="accent6">
-                  <a:lumMod val="60000"/>
-                  <a:lumOff val="40000"/>
-                </a:schemeClr>
-              </a:solidFill>
-            </a:endParaRPr>
-          </a:p>
-          <a:p>
-            <a:pPr marL="342900" indent="-342900">
-              <a:buFont typeface="Arial" panose="020B0604020202020204" pitchFamily="34" charset="0"/>
-              <a:buChar char="•"/>
-            </a:pPr>
-            <a:r>
-              <a:rPr lang="en-US" sz="2400" dirty="0">
-                <a:solidFill>
-                  <a:schemeClr val="accent6">
-                    <a:lumMod val="60000"/>
-                    <a:lumOff val="40000"/>
-                  </a:schemeClr>
-                </a:solidFill>
-              </a:rPr>
-              <a:t>CNN is run </a:t>
-            </a:r>
-            <a:r>
-              <a:rPr lang="en-US" sz="2400" b="1" dirty="0">
-                <a:solidFill>
-                  <a:schemeClr val="accent6">
-                    <a:lumMod val="60000"/>
-                    <a:lumOff val="40000"/>
-                  </a:schemeClr>
-                </a:solidFill>
-              </a:rPr>
-              <a:t>2000 times per image</a:t>
-            </a:r>
-            <a:r>
-              <a:rPr lang="en-US" sz="2400" dirty="0">
-                <a:solidFill>
-                  <a:schemeClr val="accent6">
-                    <a:lumMod val="60000"/>
-                    <a:lumOff val="40000"/>
-                  </a:schemeClr>
-                </a:solidFill>
-              </a:rPr>
-              <a:t> </a:t>
-            </a:r>
-          </a:p>
-          <a:p>
-            <a:pPr marL="342900" indent="-342900">
-              <a:buFont typeface="Arial" panose="020B0604020202020204" pitchFamily="34" charset="0"/>
-              <a:buChar char="•"/>
-            </a:pPr>
-            <a:r>
-              <a:rPr lang="en-US" sz="2400" dirty="0">
-                <a:solidFill>
-                  <a:schemeClr val="accent6">
-                    <a:lumMod val="60000"/>
-                    <a:lumOff val="40000"/>
-                  </a:schemeClr>
-                </a:solidFill>
-              </a:rPr>
-              <a:t>Very slow (not practical for real-time) </a:t>
-            </a:r>
-          </a:p>
-          <a:p>
-            <a:pPr>
-              <a:buNone/>
-            </a:pPr>
-            <a:endParaRPr lang="en-US" sz="2400" dirty="0">
-              <a:solidFill>
-                <a:schemeClr val="accent6">
-                  <a:lumMod val="60000"/>
-                  <a:lumOff val="40000"/>
-                </a:schemeClr>
-              </a:solidFill>
-            </a:endParaRPr>
-          </a:p>
-          <a:p>
-            <a:pPr>
-              <a:buNone/>
-            </a:pPr>
-            <a:r>
-              <a:rPr lang="en-US" sz="2400" dirty="0">
-                <a:solidFill>
-                  <a:schemeClr val="accent6">
-                    <a:lumMod val="60000"/>
-                    <a:lumOff val="40000"/>
-                  </a:schemeClr>
-                </a:solidFill>
-              </a:rPr>
-              <a:t>This motivates :</a:t>
-            </a:r>
-          </a:p>
-          <a:p>
-            <a:pPr marL="342900" indent="-342900">
-              <a:buFont typeface="Arial" panose="020B0604020202020204" pitchFamily="34" charset="0"/>
-              <a:buChar char="•"/>
-            </a:pPr>
-            <a:r>
-              <a:rPr lang="en-US" sz="2400" b="1" dirty="0">
-                <a:solidFill>
-                  <a:schemeClr val="accent6">
-                    <a:lumMod val="60000"/>
-                    <a:lumOff val="40000"/>
-                  </a:schemeClr>
-                </a:solidFill>
-              </a:rPr>
-              <a:t>Fast R-CNN</a:t>
-            </a:r>
-            <a:r>
-              <a:rPr lang="en-US" sz="2400" dirty="0">
-                <a:solidFill>
-                  <a:schemeClr val="accent6">
-                    <a:lumMod val="60000"/>
-                    <a:lumOff val="40000"/>
-                  </a:schemeClr>
-                </a:solidFill>
-              </a:rPr>
-              <a:t> </a:t>
-            </a:r>
-          </a:p>
-          <a:p>
-            <a:pPr marL="342900" indent="-342900">
-              <a:buFont typeface="Arial" panose="020B0604020202020204" pitchFamily="34" charset="0"/>
-              <a:buChar char="•"/>
-            </a:pPr>
-            <a:r>
-              <a:rPr lang="en-US" sz="2400" b="1" dirty="0">
-                <a:solidFill>
-                  <a:schemeClr val="accent6">
-                    <a:lumMod val="60000"/>
-                    <a:lumOff val="40000"/>
-                  </a:schemeClr>
-                </a:solidFill>
-              </a:rPr>
-              <a:t>Faster R-CNN</a:t>
-            </a:r>
-            <a:endParaRPr lang="en-US" sz="2400" dirty="0">
-              <a:solidFill>
-                <a:schemeClr val="accent6">
-                  <a:lumMod val="60000"/>
-                  <a:lumOff val="40000"/>
-                </a:schemeClr>
-              </a:solidFill>
-            </a:endParaRPr>
-          </a:p>
-        </p:txBody>
-      </p:sp>
-    </p:spTree>
-    <p:extLst>
-      <p:ext uri="{BB962C8B-B14F-4D97-AF65-F5344CB8AC3E}">
-        <p14:creationId xmlns:p14="http://schemas.microsoft.com/office/powerpoint/2010/main" val="2394958503"/>
-      </p:ext>
-    </p:extLst>
-  </p:cSld>
-  <p:clrMapOvr>
-    <a:masterClrMapping/>
-  </p:clrMapOvr>
-</p:sld>
-</file>
-
-<file path=ppt/slides/slide7.xml><?xml version="1.0" encoding="utf-8"?>
-<p:sld xmlns:a="http://schemas.openxmlformats.org/drawingml/2006/main" xmlns:r="http://schemas.openxmlformats.org/officeDocument/2006/relationships" xmlns:p="http://schemas.openxmlformats.org/presentationml/2006/main">
-  <p:cSld>
-    <p:spTree>
-      <p:nvGrpSpPr>
-        <p:cNvPr id="1" name="">
-          <a:extLst>
-            <a:ext uri="{FF2B5EF4-FFF2-40B4-BE49-F238E27FC236}">
-              <a16:creationId xmlns:a16="http://schemas.microsoft.com/office/drawing/2014/main" id="{93A43C8F-CE14-8FC5-AFCE-AFA6EE9C6778}"/>
-            </a:ext>
-          </a:extLst>
-        </p:cNvPr>
-        <p:cNvGrpSpPr/>
-        <p:nvPr/>
-      </p:nvGrpSpPr>
-      <p:grpSpPr>
-        <a:xfrm>
-          <a:off x="0" y="0"/>
-          <a:ext cx="0" cy="0"/>
-          <a:chOff x="0" y="0"/>
-          <a:chExt cx="0" cy="0"/>
-        </a:xfrm>
-      </p:grpSpPr>
-      <p:sp>
-        <p:nvSpPr>
-          <p:cNvPr id="4" name="TextBox 3">
-            <a:extLst>
-              <a:ext uri="{FF2B5EF4-FFF2-40B4-BE49-F238E27FC236}">
-                <a16:creationId xmlns:a16="http://schemas.microsoft.com/office/drawing/2014/main" id="{BB2D91BC-43B4-25D5-77DD-436A13A0918C}"/>
-              </a:ext>
-            </a:extLst>
-          </p:cNvPr>
-          <p:cNvSpPr txBox="1"/>
-          <p:nvPr/>
-        </p:nvSpPr>
-        <p:spPr>
-          <a:xfrm>
-            <a:off x="260604" y="73813"/>
-            <a:ext cx="7822692" cy="1200329"/>
-          </a:xfrm>
-          <a:prstGeom prst="rect">
-            <a:avLst/>
-          </a:prstGeom>
-          <a:noFill/>
-        </p:spPr>
-        <p:txBody>
-          <a:bodyPr wrap="square">
-            <a:spAutoFit/>
-          </a:bodyPr>
-          <a:lstStyle/>
-          <a:p>
-            <a:r>
-              <a:rPr lang="en-US" sz="2400" b="1" dirty="0">
-                <a:solidFill>
-                  <a:schemeClr val="accent6">
-                    <a:lumMod val="60000"/>
-                    <a:lumOff val="40000"/>
-                  </a:schemeClr>
-                </a:solidFill>
-              </a:rPr>
-              <a:t>2. Fast R-CNN</a:t>
-            </a:r>
-          </a:p>
-          <a:p>
-            <a:endParaRPr lang="en-US" sz="2400" b="1" dirty="0">
-              <a:solidFill>
-                <a:schemeClr val="accent6">
-                  <a:lumMod val="60000"/>
-                  <a:lumOff val="40000"/>
-                </a:schemeClr>
-              </a:solidFill>
-            </a:endParaRPr>
-          </a:p>
-          <a:p>
-            <a:pPr marL="342900" indent="-342900">
-              <a:buFont typeface="Arial" panose="020B0604020202020204" pitchFamily="34" charset="0"/>
-              <a:buChar char="•"/>
-            </a:pPr>
-            <a:r>
-              <a:rPr lang="en-US" sz="2400" dirty="0">
-                <a:solidFill>
-                  <a:schemeClr val="accent6">
-                    <a:lumMod val="60000"/>
-                    <a:lumOff val="40000"/>
-                  </a:schemeClr>
-                </a:solidFill>
-              </a:rPr>
-              <a:t>Improves R-CNN (no repeated CNN per region) </a:t>
-            </a:r>
-          </a:p>
-        </p:txBody>
-      </p:sp>
-      <p:sp>
-        <p:nvSpPr>
-          <p:cNvPr id="2" name="TextBox 1">
-            <a:extLst>
-              <a:ext uri="{FF2B5EF4-FFF2-40B4-BE49-F238E27FC236}">
-                <a16:creationId xmlns:a16="http://schemas.microsoft.com/office/drawing/2014/main" id="{E4F5E6EA-9BFE-5BFA-6ED4-7211A14BA083}"/>
-              </a:ext>
-            </a:extLst>
-          </p:cNvPr>
-          <p:cNvSpPr txBox="1"/>
-          <p:nvPr/>
-        </p:nvSpPr>
-        <p:spPr>
-          <a:xfrm>
-            <a:off x="260604" y="2688997"/>
-            <a:ext cx="7822692" cy="1569660"/>
-          </a:xfrm>
-          <a:prstGeom prst="rect">
-            <a:avLst/>
-          </a:prstGeom>
-          <a:noFill/>
-        </p:spPr>
-        <p:txBody>
-          <a:bodyPr wrap="square">
-            <a:spAutoFit/>
-          </a:bodyPr>
-          <a:lstStyle/>
-          <a:p>
-            <a:r>
-              <a:rPr lang="en-US" sz="2400" b="1" dirty="0">
-                <a:solidFill>
-                  <a:schemeClr val="accent6">
-                    <a:lumMod val="60000"/>
-                    <a:lumOff val="40000"/>
-                  </a:schemeClr>
-                </a:solidFill>
-              </a:rPr>
-              <a:t>3. Faster R-CNN</a:t>
-            </a:r>
-          </a:p>
-          <a:p>
-            <a:endParaRPr lang="en-US" sz="2400" b="1" dirty="0">
-              <a:solidFill>
-                <a:schemeClr val="accent6">
-                  <a:lumMod val="60000"/>
-                  <a:lumOff val="40000"/>
-                </a:schemeClr>
-              </a:solidFill>
-            </a:endParaRPr>
-          </a:p>
-          <a:p>
-            <a:pPr marL="342900" indent="-342900">
-              <a:buFont typeface="Arial" panose="020B0604020202020204" pitchFamily="34" charset="0"/>
-              <a:buChar char="•"/>
-            </a:pPr>
-            <a:r>
-              <a:rPr lang="en-US" sz="2400" dirty="0">
-                <a:solidFill>
-                  <a:schemeClr val="accent6">
-                    <a:lumMod val="60000"/>
-                    <a:lumOff val="40000"/>
-                  </a:schemeClr>
-                </a:solidFill>
-              </a:rPr>
-              <a:t>Adds Region Proposal Network (RPN) </a:t>
-            </a:r>
-          </a:p>
-          <a:p>
-            <a:pPr marL="342900" indent="-342900">
-              <a:buFont typeface="Arial" panose="020B0604020202020204" pitchFamily="34" charset="0"/>
-              <a:buChar char="•"/>
-            </a:pPr>
-            <a:r>
-              <a:rPr lang="en-US" sz="2400" dirty="0">
-                <a:solidFill>
-                  <a:schemeClr val="accent6">
-                    <a:lumMod val="60000"/>
-                    <a:lumOff val="40000"/>
-                  </a:schemeClr>
-                </a:solidFill>
-              </a:rPr>
-              <a:t>Slightly more complex but logical extension </a:t>
-            </a:r>
-          </a:p>
-        </p:txBody>
-      </p:sp>
-    </p:spTree>
-    <p:extLst>
-      <p:ext uri="{BB962C8B-B14F-4D97-AF65-F5344CB8AC3E}">
-        <p14:creationId xmlns:p14="http://schemas.microsoft.com/office/powerpoint/2010/main" val="154926476"/>
-      </p:ext>
-    </p:extLst>
-  </p:cSld>
-  <p:clrMapOvr>
-    <a:masterClrMapping/>
-  </p:clrMapOvr>
-</p:sld>
-</file>
-
-<file path=ppt/slides/slide8.xml><?xml version="1.0" encoding="utf-8"?>
-<p:sld xmlns:a="http://schemas.openxmlformats.org/drawingml/2006/main" xmlns:r="http://schemas.openxmlformats.org/officeDocument/2006/relationships" xmlns:p="http://schemas.openxmlformats.org/presentationml/2006/main">
-  <p:cSld>
-    <p:spTree>
-      <p:nvGrpSpPr>
-        <p:cNvPr id="1" name="">
-          <a:extLst>
-            <a:ext uri="{FF2B5EF4-FFF2-40B4-BE49-F238E27FC236}">
-              <a16:creationId xmlns:a16="http://schemas.microsoft.com/office/drawing/2014/main" id="{DF8A4539-2D0C-7E1F-C1D9-884492AA92F3}"/>
-            </a:ext>
-          </a:extLst>
-        </p:cNvPr>
-        <p:cNvGrpSpPr/>
-        <p:nvPr/>
-      </p:nvGrpSpPr>
-      <p:grpSpPr>
-        <a:xfrm>
-          <a:off x="0" y="0"/>
-          <a:ext cx="0" cy="0"/>
-          <a:chOff x="0" y="0"/>
-          <a:chExt cx="0" cy="0"/>
-        </a:xfrm>
-      </p:grpSpPr>
-      <p:sp>
-        <p:nvSpPr>
-          <p:cNvPr id="4" name="TextBox 3">
-            <a:extLst>
-              <a:ext uri="{FF2B5EF4-FFF2-40B4-BE49-F238E27FC236}">
-                <a16:creationId xmlns:a16="http://schemas.microsoft.com/office/drawing/2014/main" id="{3839E7FD-E00B-B9B7-8310-34A3B768E83E}"/>
-              </a:ext>
-            </a:extLst>
-          </p:cNvPr>
-          <p:cNvSpPr txBox="1"/>
-          <p:nvPr/>
-        </p:nvSpPr>
-        <p:spPr>
-          <a:xfrm>
-            <a:off x="260604" y="73813"/>
-            <a:ext cx="7822692" cy="2308324"/>
-          </a:xfrm>
-          <a:prstGeom prst="rect">
-            <a:avLst/>
-          </a:prstGeom>
-          <a:noFill/>
-        </p:spPr>
-        <p:txBody>
-          <a:bodyPr wrap="square">
-            <a:spAutoFit/>
-          </a:bodyPr>
-          <a:lstStyle/>
-          <a:p>
-            <a:r>
-              <a:rPr lang="en-US" sz="2400" b="1" dirty="0">
-                <a:solidFill>
-                  <a:schemeClr val="accent6">
-                    <a:lumMod val="60000"/>
-                    <a:lumOff val="40000"/>
-                  </a:schemeClr>
-                </a:solidFill>
-              </a:rPr>
-              <a:t>4. YOLO (You Only Look Once)</a:t>
-            </a:r>
-          </a:p>
-          <a:p>
-            <a:endParaRPr lang="en-US" sz="2400" b="1" dirty="0">
-              <a:solidFill>
-                <a:schemeClr val="accent6">
-                  <a:lumMod val="60000"/>
-                  <a:lumOff val="40000"/>
-                </a:schemeClr>
-              </a:solidFill>
-            </a:endParaRPr>
-          </a:p>
-          <a:p>
-            <a:r>
-              <a:rPr lang="en-US" sz="2400" dirty="0">
-                <a:solidFill>
-                  <a:schemeClr val="accent6">
-                    <a:lumMod val="60000"/>
-                    <a:lumOff val="40000"/>
-                  </a:schemeClr>
-                </a:solidFill>
-              </a:rPr>
-              <a:t>Entire image → single pass → predicts everything </a:t>
-            </a:r>
-          </a:p>
-          <a:p>
-            <a:endParaRPr lang="en-US" sz="2400" dirty="0">
-              <a:solidFill>
-                <a:schemeClr val="accent6">
-                  <a:lumMod val="60000"/>
-                  <a:lumOff val="40000"/>
-                </a:schemeClr>
-              </a:solidFill>
-            </a:endParaRPr>
-          </a:p>
-          <a:p>
-            <a:r>
-              <a:rPr lang="en-US" sz="2400" dirty="0">
-                <a:solidFill>
-                  <a:schemeClr val="accent6">
-                    <a:lumMod val="60000"/>
-                    <a:lumOff val="40000"/>
-                  </a:schemeClr>
-                </a:solidFill>
-              </a:rPr>
-              <a:t>Think: “one shot detection” </a:t>
-            </a:r>
-          </a:p>
-          <a:p>
-            <a:r>
-              <a:rPr lang="en-US" sz="2400" dirty="0">
-                <a:solidFill>
-                  <a:schemeClr val="accent6">
-                    <a:lumMod val="60000"/>
-                    <a:lumOff val="40000"/>
-                  </a:schemeClr>
-                </a:solidFill>
-              </a:rPr>
-              <a:t>👉 Harder conceptually (grid system, anchor boxes)</a:t>
-            </a:r>
-          </a:p>
-        </p:txBody>
-      </p:sp>
-    </p:spTree>
-    <p:extLst>
-      <p:ext uri="{BB962C8B-B14F-4D97-AF65-F5344CB8AC3E}">
-        <p14:creationId xmlns:p14="http://schemas.microsoft.com/office/powerpoint/2010/main" val="535229357"/>
-      </p:ext>
-    </p:extLst>
-  </p:cSld>
-  <p:clrMapOvr>
-    <a:masterClrMapping/>
-  </p:clrMapOvr>
-</p:sld>
-</file>
-
-<file path=ppt/slides/slide9.xml><?xml version="1.0" encoding="utf-8"?>
+<file path=ppt/slides/slide10.xml><?xml version="1.0" encoding="utf-8"?>
 <p:sld xmlns:a="http://schemas.openxmlformats.org/drawingml/2006/main" xmlns:r="http://schemas.openxmlformats.org/officeDocument/2006/relationships" xmlns:p="http://schemas.openxmlformats.org/presentationml/2006/main">
   <p:cSld>
     <p:spTree>
@@ -5630,6 +4070,1783 @@
     <p:extLst>
       <p:ext uri="{BB962C8B-B14F-4D97-AF65-F5344CB8AC3E}">
         <p14:creationId xmlns:p14="http://schemas.microsoft.com/office/powerpoint/2010/main" val="366625378"/>
+      </p:ext>
+    </p:extLst>
+  </p:cSld>
+  <p:clrMapOvr>
+    <a:masterClrMapping/>
+  </p:clrMapOvr>
+</p:sld>
+</file>
+
+<file path=ppt/slides/slide2.xml><?xml version="1.0" encoding="utf-8"?>
+<p:sld xmlns:a="http://schemas.openxmlformats.org/drawingml/2006/main" xmlns:r="http://schemas.openxmlformats.org/officeDocument/2006/relationships" xmlns:p="http://schemas.openxmlformats.org/presentationml/2006/main">
+  <p:cSld>
+    <p:spTree>
+      <p:nvGrpSpPr>
+        <p:cNvPr id="1" name=""/>
+        <p:cNvGrpSpPr/>
+        <p:nvPr/>
+      </p:nvGrpSpPr>
+      <p:grpSpPr>
+        <a:xfrm>
+          <a:off x="0" y="0"/>
+          <a:ext cx="0" cy="0"/>
+          <a:chOff x="0" y="0"/>
+          <a:chExt cx="0" cy="0"/>
+        </a:xfrm>
+      </p:grpSpPr>
+      <p:sp>
+        <p:nvSpPr>
+          <p:cNvPr id="4" name="TextBox 3">
+            <a:extLst>
+              <a:ext uri="{FF2B5EF4-FFF2-40B4-BE49-F238E27FC236}">
+                <a16:creationId xmlns:a16="http://schemas.microsoft.com/office/drawing/2014/main" id="{06500EF0-C39A-3394-E2DA-9C20DA34E655}"/>
+              </a:ext>
+            </a:extLst>
+          </p:cNvPr>
+          <p:cNvSpPr txBox="1"/>
+          <p:nvPr/>
+        </p:nvSpPr>
+        <p:spPr>
+          <a:xfrm>
+            <a:off x="141732" y="73813"/>
+            <a:ext cx="10977372" cy="2308324"/>
+          </a:xfrm>
+          <a:prstGeom prst="rect">
+            <a:avLst/>
+          </a:prstGeom>
+          <a:noFill/>
+        </p:spPr>
+        <p:txBody>
+          <a:bodyPr wrap="square">
+            <a:spAutoFit/>
+          </a:bodyPr>
+          <a:lstStyle/>
+          <a:p>
+            <a:r>
+              <a:rPr lang="en-US" sz="2400" b="1" dirty="0">
+                <a:solidFill>
+                  <a:schemeClr val="accent6">
+                    <a:lumMod val="60000"/>
+                    <a:lumOff val="40000"/>
+                  </a:schemeClr>
+                </a:solidFill>
+              </a:rPr>
+              <a:t>Object detection</a:t>
+            </a:r>
+            <a:r>
+              <a:rPr lang="en-US" sz="2400" dirty="0">
+                <a:solidFill>
+                  <a:schemeClr val="accent6">
+                    <a:lumMod val="60000"/>
+                    <a:lumOff val="40000"/>
+                  </a:schemeClr>
+                </a:solidFill>
+              </a:rPr>
+              <a:t> is a computer vision technology that allows systems to </a:t>
+            </a:r>
+            <a:r>
+              <a:rPr lang="en-US" sz="2400" b="1" dirty="0">
+                <a:solidFill>
+                  <a:schemeClr val="accent6">
+                    <a:lumMod val="60000"/>
+                    <a:lumOff val="40000"/>
+                  </a:schemeClr>
+                </a:solidFill>
+              </a:rPr>
+              <a:t>identify and locate</a:t>
+            </a:r>
+            <a:r>
+              <a:rPr lang="en-US" sz="2400" dirty="0">
+                <a:solidFill>
+                  <a:schemeClr val="accent6">
+                    <a:lumMod val="60000"/>
+                    <a:lumOff val="40000"/>
+                  </a:schemeClr>
+                </a:solidFill>
+              </a:rPr>
+              <a:t> specific objects within an image or video.</a:t>
+            </a:r>
+          </a:p>
+          <a:p>
+            <a:endParaRPr lang="en-US" sz="2400" dirty="0">
+              <a:solidFill>
+                <a:schemeClr val="accent6">
+                  <a:lumMod val="60000"/>
+                  <a:lumOff val="40000"/>
+                </a:schemeClr>
+              </a:solidFill>
+            </a:endParaRPr>
+          </a:p>
+          <a:p>
+            <a:r>
+              <a:rPr lang="en-US" sz="2400" dirty="0">
+                <a:solidFill>
+                  <a:schemeClr val="accent6">
+                    <a:lumMod val="60000"/>
+                    <a:lumOff val="40000"/>
+                  </a:schemeClr>
+                </a:solidFill>
+              </a:rPr>
+              <a:t>It answers two fundamental questions:</a:t>
+            </a:r>
+          </a:p>
+          <a:p>
+            <a:pPr marL="342900" indent="-342900">
+              <a:buFont typeface="Arial" panose="020B0604020202020204" pitchFamily="34" charset="0"/>
+              <a:buChar char="•"/>
+            </a:pPr>
+            <a:r>
+              <a:rPr lang="en-US" sz="2400" b="1" dirty="0">
+                <a:solidFill>
+                  <a:schemeClr val="accent6">
+                    <a:lumMod val="60000"/>
+                    <a:lumOff val="40000"/>
+                  </a:schemeClr>
+                </a:solidFill>
+              </a:rPr>
+              <a:t>"What is it?"</a:t>
+            </a:r>
+            <a:r>
+              <a:rPr lang="en-US" sz="2400" dirty="0">
+                <a:solidFill>
+                  <a:schemeClr val="accent6">
+                    <a:lumMod val="60000"/>
+                    <a:lumOff val="40000"/>
+                  </a:schemeClr>
+                </a:solidFill>
+              </a:rPr>
+              <a:t> (classification) and </a:t>
+            </a:r>
+          </a:p>
+          <a:p>
+            <a:pPr marL="342900" indent="-342900">
+              <a:buFont typeface="Arial" panose="020B0604020202020204" pitchFamily="34" charset="0"/>
+              <a:buChar char="•"/>
+            </a:pPr>
+            <a:r>
+              <a:rPr lang="en-US" sz="2400" b="1" dirty="0">
+                <a:solidFill>
+                  <a:schemeClr val="accent6">
+                    <a:lumMod val="60000"/>
+                    <a:lumOff val="40000"/>
+                  </a:schemeClr>
+                </a:solidFill>
+              </a:rPr>
+              <a:t>"Where is it?"</a:t>
+            </a:r>
+            <a:r>
+              <a:rPr lang="en-US" sz="2400" dirty="0">
+                <a:solidFill>
+                  <a:schemeClr val="accent6">
+                    <a:lumMod val="60000"/>
+                    <a:lumOff val="40000"/>
+                  </a:schemeClr>
+                </a:solidFill>
+              </a:rPr>
+              <a:t> (localization)</a:t>
+            </a:r>
+          </a:p>
+        </p:txBody>
+      </p:sp>
+      <p:pic>
+        <p:nvPicPr>
+          <p:cNvPr id="6" name="Picture 5">
+            <a:extLst>
+              <a:ext uri="{FF2B5EF4-FFF2-40B4-BE49-F238E27FC236}">
+                <a16:creationId xmlns:a16="http://schemas.microsoft.com/office/drawing/2014/main" id="{36A06A5E-8757-4B20-DC6E-A69381905273}"/>
+              </a:ext>
+            </a:extLst>
+          </p:cNvPr>
+          <p:cNvPicPr>
+            <a:picLocks noChangeAspect="1"/>
+          </p:cNvPicPr>
+          <p:nvPr/>
+        </p:nvPicPr>
+        <p:blipFill>
+          <a:blip r:embed="rId2">
+            <a:extLst>
+              <a:ext uri="{28A0092B-C50C-407E-A947-70E740481C1C}">
+                <a14:useLocalDpi xmlns:a14="http://schemas.microsoft.com/office/drawing/2010/main" val="0"/>
+              </a:ext>
+            </a:extLst>
+          </a:blip>
+          <a:stretch>
+            <a:fillRect/>
+          </a:stretch>
+        </p:blipFill>
+        <p:spPr>
+          <a:xfrm>
+            <a:off x="4029295" y="1938992"/>
+            <a:ext cx="7902101" cy="4845195"/>
+          </a:xfrm>
+          <a:prstGeom prst="rect">
+            <a:avLst/>
+          </a:prstGeom>
+        </p:spPr>
+      </p:pic>
+    </p:spTree>
+    <p:extLst>
+      <p:ext uri="{BB962C8B-B14F-4D97-AF65-F5344CB8AC3E}">
+        <p14:creationId xmlns:p14="http://schemas.microsoft.com/office/powerpoint/2010/main" val="4221193315"/>
+      </p:ext>
+    </p:extLst>
+  </p:cSld>
+  <p:clrMapOvr>
+    <a:masterClrMapping/>
+  </p:clrMapOvr>
+</p:sld>
+</file>
+
+<file path=ppt/slides/slide3.xml><?xml version="1.0" encoding="utf-8"?>
+<p:sld xmlns:a="http://schemas.openxmlformats.org/drawingml/2006/main" xmlns:r="http://schemas.openxmlformats.org/officeDocument/2006/relationships" xmlns:p="http://schemas.openxmlformats.org/presentationml/2006/main">
+  <p:cSld>
+    <p:spTree>
+      <p:nvGrpSpPr>
+        <p:cNvPr id="1" name="">
+          <a:extLst>
+            <a:ext uri="{FF2B5EF4-FFF2-40B4-BE49-F238E27FC236}">
+              <a16:creationId xmlns:a16="http://schemas.microsoft.com/office/drawing/2014/main" id="{98CAE3EC-39E2-EABF-2D79-5DB82A09B5A7}"/>
+            </a:ext>
+          </a:extLst>
+        </p:cNvPr>
+        <p:cNvGrpSpPr/>
+        <p:nvPr/>
+      </p:nvGrpSpPr>
+      <p:grpSpPr>
+        <a:xfrm>
+          <a:off x="0" y="0"/>
+          <a:ext cx="0" cy="0"/>
+          <a:chOff x="0" y="0"/>
+          <a:chExt cx="0" cy="0"/>
+        </a:xfrm>
+      </p:grpSpPr>
+      <p:sp>
+        <p:nvSpPr>
+          <p:cNvPr id="4" name="TextBox 3">
+            <a:extLst>
+              <a:ext uri="{FF2B5EF4-FFF2-40B4-BE49-F238E27FC236}">
+                <a16:creationId xmlns:a16="http://schemas.microsoft.com/office/drawing/2014/main" id="{FB9687C8-6A5C-1D90-8356-84A16DA788AA}"/>
+              </a:ext>
+            </a:extLst>
+          </p:cNvPr>
+          <p:cNvSpPr txBox="1"/>
+          <p:nvPr/>
+        </p:nvSpPr>
+        <p:spPr>
+          <a:xfrm>
+            <a:off x="260604" y="73813"/>
+            <a:ext cx="6190488" cy="3785652"/>
+          </a:xfrm>
+          <a:prstGeom prst="rect">
+            <a:avLst/>
+          </a:prstGeom>
+          <a:noFill/>
+        </p:spPr>
+        <p:txBody>
+          <a:bodyPr wrap="square">
+            <a:spAutoFit/>
+          </a:bodyPr>
+          <a:lstStyle/>
+          <a:p>
+            <a:r>
+              <a:rPr lang="en-US" sz="2400" dirty="0">
+                <a:solidFill>
+                  <a:schemeClr val="accent6">
+                    <a:lumMod val="60000"/>
+                    <a:lumOff val="40000"/>
+                  </a:schemeClr>
+                </a:solidFill>
+              </a:rPr>
+              <a:t>Object detection model evolution</a:t>
+            </a:r>
+          </a:p>
+          <a:p>
+            <a:pPr marL="457200" indent="-457200">
+              <a:buFont typeface="+mj-lt"/>
+              <a:buAutoNum type="arabicPeriod"/>
+            </a:pPr>
+            <a:r>
+              <a:rPr lang="en-US" sz="2400" dirty="0">
+                <a:solidFill>
+                  <a:schemeClr val="accent6">
+                    <a:lumMod val="60000"/>
+                    <a:lumOff val="40000"/>
+                  </a:schemeClr>
+                </a:solidFill>
+              </a:rPr>
+              <a:t>R-CNN – (Explained here)</a:t>
+            </a:r>
+          </a:p>
+          <a:p>
+            <a:pPr marL="457200" indent="-457200">
+              <a:buFont typeface="+mj-lt"/>
+              <a:buAutoNum type="arabicPeriod"/>
+            </a:pPr>
+            <a:endParaRPr lang="en-US" sz="2400" dirty="0">
+              <a:solidFill>
+                <a:schemeClr val="accent6">
+                  <a:lumMod val="60000"/>
+                  <a:lumOff val="40000"/>
+                </a:schemeClr>
+              </a:solidFill>
+            </a:endParaRPr>
+          </a:p>
+          <a:p>
+            <a:pPr marL="457200" indent="-457200">
+              <a:buFont typeface="+mj-lt"/>
+              <a:buAutoNum type="arabicPeriod"/>
+            </a:pPr>
+            <a:r>
+              <a:rPr lang="en-US" sz="2400" dirty="0">
+                <a:solidFill>
+                  <a:schemeClr val="accent6">
+                    <a:lumMod val="60000"/>
+                    <a:lumOff val="40000"/>
+                  </a:schemeClr>
+                </a:solidFill>
+              </a:rPr>
+              <a:t>Fast R-CNN (optimization idea)</a:t>
+            </a:r>
+          </a:p>
+          <a:p>
+            <a:pPr marL="457200" indent="-457200">
+              <a:buFont typeface="+mj-lt"/>
+              <a:buAutoNum type="arabicPeriod"/>
+            </a:pPr>
+            <a:endParaRPr lang="en-US" sz="2400" dirty="0">
+              <a:solidFill>
+                <a:schemeClr val="accent6">
+                  <a:lumMod val="60000"/>
+                  <a:lumOff val="40000"/>
+                </a:schemeClr>
+              </a:solidFill>
+            </a:endParaRPr>
+          </a:p>
+          <a:p>
+            <a:pPr marL="457200" indent="-457200">
+              <a:buFont typeface="+mj-lt"/>
+              <a:buAutoNum type="arabicPeriod"/>
+            </a:pPr>
+            <a:r>
+              <a:rPr lang="en-US" sz="2400" dirty="0">
+                <a:solidFill>
+                  <a:schemeClr val="accent6">
+                    <a:lumMod val="60000"/>
+                    <a:lumOff val="40000"/>
+                  </a:schemeClr>
+                </a:solidFill>
+              </a:rPr>
+              <a:t>Faster R-CNN (modern region proposal)</a:t>
+            </a:r>
+          </a:p>
+          <a:p>
+            <a:pPr marL="457200" indent="-457200">
+              <a:buFont typeface="+mj-lt"/>
+              <a:buAutoNum type="arabicPeriod"/>
+            </a:pPr>
+            <a:endParaRPr lang="en-US" sz="2400" dirty="0">
+              <a:solidFill>
+                <a:schemeClr val="accent6">
+                  <a:lumMod val="60000"/>
+                  <a:lumOff val="40000"/>
+                </a:schemeClr>
+              </a:solidFill>
+            </a:endParaRPr>
+          </a:p>
+          <a:p>
+            <a:pPr marL="457200" indent="-457200">
+              <a:buFont typeface="+mj-lt"/>
+              <a:buAutoNum type="arabicPeriod"/>
+            </a:pPr>
+            <a:r>
+              <a:rPr lang="en-US" sz="2400" dirty="0">
+                <a:solidFill>
+                  <a:schemeClr val="accent6">
+                    <a:lumMod val="60000"/>
+                    <a:lumOff val="40000"/>
+                  </a:schemeClr>
+                </a:solidFill>
+              </a:rPr>
+              <a:t>SSD</a:t>
+            </a:r>
+          </a:p>
+          <a:p>
+            <a:pPr marL="457200" indent="-457200">
+              <a:buFont typeface="+mj-lt"/>
+              <a:buAutoNum type="arabicPeriod"/>
+            </a:pPr>
+            <a:endParaRPr lang="en-US" sz="2400" dirty="0">
+              <a:solidFill>
+                <a:schemeClr val="accent6">
+                  <a:lumMod val="60000"/>
+                  <a:lumOff val="40000"/>
+                </a:schemeClr>
+              </a:solidFill>
+            </a:endParaRPr>
+          </a:p>
+          <a:p>
+            <a:pPr marL="457200" indent="-457200">
+              <a:buFont typeface="+mj-lt"/>
+              <a:buAutoNum type="arabicPeriod"/>
+            </a:pPr>
+            <a:r>
+              <a:rPr lang="en-US" sz="2400" dirty="0">
+                <a:solidFill>
+                  <a:schemeClr val="accent6">
+                    <a:lumMod val="60000"/>
+                    <a:lumOff val="40000"/>
+                  </a:schemeClr>
+                </a:solidFill>
+              </a:rPr>
+              <a:t>YOLO (industry - today )</a:t>
+            </a:r>
+          </a:p>
+        </p:txBody>
+      </p:sp>
+    </p:spTree>
+    <p:extLst>
+      <p:ext uri="{BB962C8B-B14F-4D97-AF65-F5344CB8AC3E}">
+        <p14:creationId xmlns:p14="http://schemas.microsoft.com/office/powerpoint/2010/main" val="1086825773"/>
+      </p:ext>
+    </p:extLst>
+  </p:cSld>
+  <p:clrMapOvr>
+    <a:masterClrMapping/>
+  </p:clrMapOvr>
+</p:sld>
+</file>
+
+<file path=ppt/slides/slide4.xml><?xml version="1.0" encoding="utf-8"?>
+<p:sld xmlns:a="http://schemas.openxmlformats.org/drawingml/2006/main" xmlns:r="http://schemas.openxmlformats.org/officeDocument/2006/relationships" xmlns:p="http://schemas.openxmlformats.org/presentationml/2006/main">
+  <p:cSld>
+    <p:spTree>
+      <p:nvGrpSpPr>
+        <p:cNvPr id="1" name="">
+          <a:extLst>
+            <a:ext uri="{FF2B5EF4-FFF2-40B4-BE49-F238E27FC236}">
+              <a16:creationId xmlns:a16="http://schemas.microsoft.com/office/drawing/2014/main" id="{97FB748C-E8C3-5751-AA07-D39AB1E8D1FE}"/>
+            </a:ext>
+          </a:extLst>
+        </p:cNvPr>
+        <p:cNvGrpSpPr/>
+        <p:nvPr/>
+      </p:nvGrpSpPr>
+      <p:grpSpPr>
+        <a:xfrm>
+          <a:off x="0" y="0"/>
+          <a:ext cx="0" cy="0"/>
+          <a:chOff x="0" y="0"/>
+          <a:chExt cx="0" cy="0"/>
+        </a:xfrm>
+      </p:grpSpPr>
+      <p:sp>
+        <p:nvSpPr>
+          <p:cNvPr id="4" name="TextBox 3">
+            <a:extLst>
+              <a:ext uri="{FF2B5EF4-FFF2-40B4-BE49-F238E27FC236}">
+                <a16:creationId xmlns:a16="http://schemas.microsoft.com/office/drawing/2014/main" id="{9A852C26-EA7F-1AB3-08FC-DEA360215B74}"/>
+              </a:ext>
+            </a:extLst>
+          </p:cNvPr>
+          <p:cNvSpPr txBox="1"/>
+          <p:nvPr/>
+        </p:nvSpPr>
+        <p:spPr>
+          <a:xfrm>
+            <a:off x="260604" y="73813"/>
+            <a:ext cx="8453628" cy="2677656"/>
+          </a:xfrm>
+          <a:prstGeom prst="rect">
+            <a:avLst/>
+          </a:prstGeom>
+          <a:noFill/>
+        </p:spPr>
+        <p:txBody>
+          <a:bodyPr wrap="square">
+            <a:spAutoFit/>
+          </a:bodyPr>
+          <a:lstStyle/>
+          <a:p>
+            <a:r>
+              <a:rPr lang="en-US" sz="2400" b="1" dirty="0">
+                <a:solidFill>
+                  <a:schemeClr val="accent6">
+                    <a:lumMod val="60000"/>
+                    <a:lumOff val="40000"/>
+                  </a:schemeClr>
+                </a:solidFill>
+              </a:rPr>
+              <a:t>1. R-CNN</a:t>
+            </a:r>
+          </a:p>
+          <a:p>
+            <a:r>
+              <a:rPr lang="en-US" sz="2400" dirty="0">
+                <a:solidFill>
+                  <a:schemeClr val="accent6">
+                    <a:lumMod val="60000"/>
+                    <a:lumOff val="40000"/>
+                  </a:schemeClr>
+                </a:solidFill>
+              </a:rPr>
+              <a:t>General Idea:</a:t>
+            </a:r>
+          </a:p>
+          <a:p>
+            <a:pPr lvl="1"/>
+            <a:r>
+              <a:rPr lang="en-US" sz="2400" dirty="0">
+                <a:solidFill>
+                  <a:schemeClr val="accent6">
+                    <a:lumMod val="60000"/>
+                    <a:lumOff val="40000"/>
+                  </a:schemeClr>
+                </a:solidFill>
+              </a:rPr>
+              <a:t>Step 1: Generate region proposals (possible object areas) </a:t>
+            </a:r>
+          </a:p>
+          <a:p>
+            <a:pPr lvl="1"/>
+            <a:r>
+              <a:rPr lang="en-US" sz="2400" dirty="0">
+                <a:solidFill>
+                  <a:schemeClr val="accent6">
+                    <a:lumMod val="60000"/>
+                    <a:lumOff val="40000"/>
+                  </a:schemeClr>
+                </a:solidFill>
+              </a:rPr>
+              <a:t>Step 2: Run CNN on each region </a:t>
+            </a:r>
+          </a:p>
+          <a:p>
+            <a:pPr lvl="1"/>
+            <a:r>
+              <a:rPr lang="en-US" sz="2400" dirty="0">
+                <a:solidFill>
+                  <a:schemeClr val="accent6">
+                    <a:lumMod val="60000"/>
+                    <a:lumOff val="40000"/>
+                  </a:schemeClr>
+                </a:solidFill>
+              </a:rPr>
+              <a:t>Step 3: Classify + bounding box </a:t>
+            </a:r>
+          </a:p>
+          <a:p>
+            <a:endParaRPr lang="en-US" sz="2400" dirty="0">
+              <a:solidFill>
+                <a:schemeClr val="accent6">
+                  <a:lumMod val="60000"/>
+                  <a:lumOff val="40000"/>
+                </a:schemeClr>
+              </a:solidFill>
+            </a:endParaRPr>
+          </a:p>
+          <a:p>
+            <a:r>
+              <a:rPr lang="en-US" sz="2400" dirty="0">
+                <a:solidFill>
+                  <a:schemeClr val="accent6">
+                    <a:lumMod val="60000"/>
+                    <a:lumOff val="40000"/>
+                  </a:schemeClr>
+                </a:solidFill>
+              </a:rPr>
+              <a:t>Easy analogy: “crop image → classify each crop” </a:t>
+            </a:r>
+          </a:p>
+        </p:txBody>
+      </p:sp>
+    </p:spTree>
+    <p:extLst>
+      <p:ext uri="{BB962C8B-B14F-4D97-AF65-F5344CB8AC3E}">
+        <p14:creationId xmlns:p14="http://schemas.microsoft.com/office/powerpoint/2010/main" val="150551120"/>
+      </p:ext>
+    </p:extLst>
+  </p:cSld>
+  <p:clrMapOvr>
+    <a:masterClrMapping/>
+  </p:clrMapOvr>
+</p:sld>
+</file>
+
+<file path=ppt/slides/slide5.xml><?xml version="1.0" encoding="utf-8"?>
+<p:sld xmlns:a="http://schemas.openxmlformats.org/drawingml/2006/main" xmlns:r="http://schemas.openxmlformats.org/officeDocument/2006/relationships" xmlns:p="http://schemas.openxmlformats.org/presentationml/2006/main">
+  <p:cSld>
+    <p:spTree>
+      <p:nvGrpSpPr>
+        <p:cNvPr id="1" name="">
+          <a:extLst>
+            <a:ext uri="{FF2B5EF4-FFF2-40B4-BE49-F238E27FC236}">
+              <a16:creationId xmlns:a16="http://schemas.microsoft.com/office/drawing/2014/main" id="{4EB134C4-1AEC-806C-2574-8BD95B75A5FE}"/>
+            </a:ext>
+          </a:extLst>
+        </p:cNvPr>
+        <p:cNvGrpSpPr/>
+        <p:nvPr/>
+      </p:nvGrpSpPr>
+      <p:grpSpPr>
+        <a:xfrm>
+          <a:off x="0" y="0"/>
+          <a:ext cx="0" cy="0"/>
+          <a:chOff x="0" y="0"/>
+          <a:chExt cx="0" cy="0"/>
+        </a:xfrm>
+      </p:grpSpPr>
+      <p:sp>
+        <p:nvSpPr>
+          <p:cNvPr id="4" name="TextBox 3">
+            <a:extLst>
+              <a:ext uri="{FF2B5EF4-FFF2-40B4-BE49-F238E27FC236}">
+                <a16:creationId xmlns:a16="http://schemas.microsoft.com/office/drawing/2014/main" id="{F8FF5086-151F-F18D-35C2-8570A269475D}"/>
+              </a:ext>
+            </a:extLst>
+          </p:cNvPr>
+          <p:cNvSpPr txBox="1"/>
+          <p:nvPr/>
+        </p:nvSpPr>
+        <p:spPr>
+          <a:xfrm>
+            <a:off x="260604" y="73813"/>
+            <a:ext cx="8453628" cy="461665"/>
+          </a:xfrm>
+          <a:prstGeom prst="rect">
+            <a:avLst/>
+          </a:prstGeom>
+          <a:noFill/>
+        </p:spPr>
+        <p:txBody>
+          <a:bodyPr wrap="square">
+            <a:spAutoFit/>
+          </a:bodyPr>
+          <a:lstStyle/>
+          <a:p>
+            <a:r>
+              <a:rPr lang="en-US" sz="2400" b="1" dirty="0">
+                <a:solidFill>
+                  <a:schemeClr val="accent6">
+                    <a:lumMod val="60000"/>
+                    <a:lumOff val="40000"/>
+                  </a:schemeClr>
+                </a:solidFill>
+              </a:rPr>
+              <a:t>1. R-CNN (In detail)</a:t>
+            </a:r>
+          </a:p>
+        </p:txBody>
+      </p:sp>
+      <p:sp>
+        <p:nvSpPr>
+          <p:cNvPr id="3" name="TextBox 2">
+            <a:extLst>
+              <a:ext uri="{FF2B5EF4-FFF2-40B4-BE49-F238E27FC236}">
+                <a16:creationId xmlns:a16="http://schemas.microsoft.com/office/drawing/2014/main" id="{4DA06BA5-5280-E0AE-7937-C0ADEA67D2F6}"/>
+              </a:ext>
+            </a:extLst>
+          </p:cNvPr>
+          <p:cNvSpPr txBox="1"/>
+          <p:nvPr/>
+        </p:nvSpPr>
+        <p:spPr>
+          <a:xfrm>
+            <a:off x="260604" y="711446"/>
+            <a:ext cx="5399532" cy="5632311"/>
+          </a:xfrm>
+          <a:prstGeom prst="rect">
+            <a:avLst/>
+          </a:prstGeom>
+          <a:noFill/>
+        </p:spPr>
+        <p:txBody>
+          <a:bodyPr wrap="square">
+            <a:spAutoFit/>
+          </a:bodyPr>
+          <a:lstStyle/>
+          <a:p>
+            <a:pPr marL="342900" indent="-342900">
+              <a:buAutoNum type="arabicPeriod"/>
+            </a:pPr>
+            <a:r>
+              <a:rPr lang="en-US" sz="2400" dirty="0">
+                <a:solidFill>
+                  <a:schemeClr val="accent6">
+                    <a:lumMod val="60000"/>
+                    <a:lumOff val="40000"/>
+                  </a:schemeClr>
+                </a:solidFill>
+              </a:rPr>
+              <a:t>Region Proposal:</a:t>
+            </a:r>
+          </a:p>
+          <a:p>
+            <a:r>
+              <a:rPr lang="en-US" sz="2400" dirty="0">
+                <a:solidFill>
+                  <a:schemeClr val="accent6">
+                    <a:lumMod val="60000"/>
+                    <a:lumOff val="40000"/>
+                  </a:schemeClr>
+                </a:solidFill>
+              </a:rPr>
+              <a:t>It generates ~2000 </a:t>
+            </a:r>
+            <a:r>
+              <a:rPr lang="en-US" sz="2400" b="1" dirty="0">
+                <a:solidFill>
+                  <a:schemeClr val="accent6">
+                    <a:lumMod val="60000"/>
+                    <a:lumOff val="40000"/>
+                  </a:schemeClr>
+                </a:solidFill>
+              </a:rPr>
+              <a:t>class-independent region proposals</a:t>
+            </a:r>
+            <a:r>
+              <a:rPr lang="en-US" sz="2400" dirty="0">
+                <a:solidFill>
+                  <a:schemeClr val="accent6">
+                    <a:lumMod val="60000"/>
+                    <a:lumOff val="40000"/>
+                  </a:schemeClr>
+                </a:solidFill>
+              </a:rPr>
+              <a:t> using Selective Search (i.e., it doesn’t know what the object is yet).</a:t>
+            </a:r>
+          </a:p>
+          <a:p>
+            <a:endParaRPr lang="en-US" sz="2400" dirty="0">
+              <a:solidFill>
+                <a:schemeClr val="accent6">
+                  <a:lumMod val="60000"/>
+                  <a:lumOff val="40000"/>
+                </a:schemeClr>
+              </a:solidFill>
+            </a:endParaRPr>
+          </a:p>
+          <a:p>
+            <a:r>
+              <a:rPr lang="en-US" sz="2400" dirty="0">
+                <a:solidFill>
+                  <a:schemeClr val="accent6">
+                    <a:lumMod val="60000"/>
+                    <a:lumOff val="40000"/>
+                  </a:schemeClr>
+                </a:solidFill>
+              </a:rPr>
+              <a:t>2. Feature Extraction </a:t>
+            </a:r>
+          </a:p>
+          <a:p>
+            <a:r>
+              <a:rPr lang="en-US" sz="2400" dirty="0">
+                <a:solidFill>
+                  <a:schemeClr val="accent6">
+                    <a:lumMod val="60000"/>
+                    <a:lumOff val="40000"/>
+                  </a:schemeClr>
+                </a:solidFill>
+              </a:rPr>
+              <a:t>Each region is warped (resized) to a fixed size and passed through a pre-trained CNN (like </a:t>
+            </a:r>
+            <a:r>
+              <a:rPr lang="en-US" sz="2400" dirty="0" err="1">
+                <a:solidFill>
+                  <a:schemeClr val="accent6">
+                    <a:lumMod val="60000"/>
+                    <a:lumOff val="40000"/>
+                  </a:schemeClr>
+                </a:solidFill>
+              </a:rPr>
+              <a:t>AlexNet</a:t>
+            </a:r>
+            <a:r>
+              <a:rPr lang="en-US" sz="2400" dirty="0">
+                <a:solidFill>
+                  <a:schemeClr val="accent6">
+                    <a:lumMod val="60000"/>
+                    <a:lumOff val="40000"/>
+                  </a:schemeClr>
+                </a:solidFill>
+              </a:rPr>
+              <a:t> / VGG) to extract features.</a:t>
+            </a:r>
+          </a:p>
+          <a:p>
+            <a:endParaRPr lang="en-US" sz="2400" dirty="0">
+              <a:solidFill>
+                <a:schemeClr val="accent6">
+                  <a:lumMod val="60000"/>
+                  <a:lumOff val="40000"/>
+                </a:schemeClr>
+              </a:solidFill>
+            </a:endParaRPr>
+          </a:p>
+          <a:p>
+            <a:r>
+              <a:rPr lang="en-US" sz="2400" dirty="0">
+                <a:solidFill>
+                  <a:schemeClr val="accent6">
+                    <a:lumMod val="60000"/>
+                    <a:lumOff val="40000"/>
+                  </a:schemeClr>
+                </a:solidFill>
+              </a:rPr>
+              <a:t>3. Classification</a:t>
+            </a:r>
+          </a:p>
+          <a:p>
+            <a:r>
+              <a:rPr lang="en-US" sz="2400" dirty="0">
+                <a:solidFill>
+                  <a:schemeClr val="accent6">
+                    <a:lumMod val="60000"/>
+                    <a:lumOff val="40000"/>
+                  </a:schemeClr>
+                </a:solidFill>
+              </a:rPr>
+              <a:t>A separate SVM classifier is trained per class, using CNN features.</a:t>
+            </a:r>
+          </a:p>
+        </p:txBody>
+      </p:sp>
+      <p:pic>
+        <p:nvPicPr>
+          <p:cNvPr id="6" name="Picture 5">
+            <a:extLst>
+              <a:ext uri="{FF2B5EF4-FFF2-40B4-BE49-F238E27FC236}">
+                <a16:creationId xmlns:a16="http://schemas.microsoft.com/office/drawing/2014/main" id="{B351EC89-128D-1850-55A6-447F386FD23C}"/>
+              </a:ext>
+            </a:extLst>
+          </p:cNvPr>
+          <p:cNvPicPr>
+            <a:picLocks noChangeAspect="1"/>
+          </p:cNvPicPr>
+          <p:nvPr/>
+        </p:nvPicPr>
+        <p:blipFill>
+          <a:blip r:embed="rId2"/>
+          <a:stretch>
+            <a:fillRect/>
+          </a:stretch>
+        </p:blipFill>
+        <p:spPr>
+          <a:xfrm>
+            <a:off x="5922243" y="1261871"/>
+            <a:ext cx="6164869" cy="4716125"/>
+          </a:xfrm>
+          <a:prstGeom prst="rect">
+            <a:avLst/>
+          </a:prstGeom>
+        </p:spPr>
+      </p:pic>
+      <p:sp>
+        <p:nvSpPr>
+          <p:cNvPr id="7" name="TextBox 6">
+            <a:extLst>
+              <a:ext uri="{FF2B5EF4-FFF2-40B4-BE49-F238E27FC236}">
+                <a16:creationId xmlns:a16="http://schemas.microsoft.com/office/drawing/2014/main" id="{A46C39E6-ACFC-5049-16A8-449F28180981}"/>
+              </a:ext>
+            </a:extLst>
+          </p:cNvPr>
+          <p:cNvSpPr txBox="1"/>
+          <p:nvPr/>
+        </p:nvSpPr>
+        <p:spPr>
+          <a:xfrm>
+            <a:off x="8330184" y="880004"/>
+            <a:ext cx="1732975" cy="369332"/>
+          </a:xfrm>
+          <a:prstGeom prst="rect">
+            <a:avLst/>
+          </a:prstGeom>
+          <a:noFill/>
+        </p:spPr>
+        <p:txBody>
+          <a:bodyPr wrap="none" rtlCol="0">
+            <a:spAutoFit/>
+          </a:bodyPr>
+          <a:lstStyle/>
+          <a:p>
+            <a:r>
+              <a:rPr lang="en-US" dirty="0">
+                <a:solidFill>
+                  <a:schemeClr val="accent6">
+                    <a:lumMod val="60000"/>
+                    <a:lumOff val="40000"/>
+                  </a:schemeClr>
+                </a:solidFill>
+              </a:rPr>
+              <a:t>Source: Medium</a:t>
+            </a:r>
+          </a:p>
+        </p:txBody>
+      </p:sp>
+    </p:spTree>
+    <p:extLst>
+      <p:ext uri="{BB962C8B-B14F-4D97-AF65-F5344CB8AC3E}">
+        <p14:creationId xmlns:p14="http://schemas.microsoft.com/office/powerpoint/2010/main" val="408669186"/>
+      </p:ext>
+    </p:extLst>
+  </p:cSld>
+  <p:clrMapOvr>
+    <a:masterClrMapping/>
+  </p:clrMapOvr>
+</p:sld>
+</file>
+
+<file path=ppt/slides/slide6.xml><?xml version="1.0" encoding="utf-8"?>
+<p:sld xmlns:a="http://schemas.openxmlformats.org/drawingml/2006/main" xmlns:r="http://schemas.openxmlformats.org/officeDocument/2006/relationships" xmlns:p="http://schemas.openxmlformats.org/presentationml/2006/main">
+  <p:cSld>
+    <p:spTree>
+      <p:nvGrpSpPr>
+        <p:cNvPr id="1" name="">
+          <a:extLst>
+            <a:ext uri="{FF2B5EF4-FFF2-40B4-BE49-F238E27FC236}">
+              <a16:creationId xmlns:a16="http://schemas.microsoft.com/office/drawing/2014/main" id="{D2F25460-3835-0D98-3A67-D155F6B08CB5}"/>
+            </a:ext>
+          </a:extLst>
+        </p:cNvPr>
+        <p:cNvGrpSpPr/>
+        <p:nvPr/>
+      </p:nvGrpSpPr>
+      <p:grpSpPr>
+        <a:xfrm>
+          <a:off x="0" y="0"/>
+          <a:ext cx="0" cy="0"/>
+          <a:chOff x="0" y="0"/>
+          <a:chExt cx="0" cy="0"/>
+        </a:xfrm>
+      </p:grpSpPr>
+      <p:sp>
+        <p:nvSpPr>
+          <p:cNvPr id="4" name="TextBox 3">
+            <a:extLst>
+              <a:ext uri="{FF2B5EF4-FFF2-40B4-BE49-F238E27FC236}">
+                <a16:creationId xmlns:a16="http://schemas.microsoft.com/office/drawing/2014/main" id="{35BF4D56-4612-F0D4-5244-C31E3E9FDB85}"/>
+              </a:ext>
+            </a:extLst>
+          </p:cNvPr>
+          <p:cNvSpPr txBox="1"/>
+          <p:nvPr/>
+        </p:nvSpPr>
+        <p:spPr>
+          <a:xfrm>
+            <a:off x="260604" y="73813"/>
+            <a:ext cx="8453628" cy="461665"/>
+          </a:xfrm>
+          <a:prstGeom prst="rect">
+            <a:avLst/>
+          </a:prstGeom>
+          <a:noFill/>
+        </p:spPr>
+        <p:txBody>
+          <a:bodyPr wrap="square">
+            <a:spAutoFit/>
+          </a:bodyPr>
+          <a:lstStyle/>
+          <a:p>
+            <a:r>
+              <a:rPr lang="en-US" sz="2400" b="1" dirty="0">
+                <a:solidFill>
+                  <a:schemeClr val="accent6">
+                    <a:lumMod val="60000"/>
+                    <a:lumOff val="40000"/>
+                  </a:schemeClr>
+                </a:solidFill>
+              </a:rPr>
+              <a:t>1. R-CNN (In detail)</a:t>
+            </a:r>
+          </a:p>
+        </p:txBody>
+      </p:sp>
+      <p:sp>
+        <p:nvSpPr>
+          <p:cNvPr id="3" name="TextBox 2">
+            <a:extLst>
+              <a:ext uri="{FF2B5EF4-FFF2-40B4-BE49-F238E27FC236}">
+                <a16:creationId xmlns:a16="http://schemas.microsoft.com/office/drawing/2014/main" id="{21EECCC7-4B70-53D3-739F-0DAA2FF7E661}"/>
+              </a:ext>
+            </a:extLst>
+          </p:cNvPr>
+          <p:cNvSpPr txBox="1"/>
+          <p:nvPr/>
+        </p:nvSpPr>
+        <p:spPr>
+          <a:xfrm>
+            <a:off x="104888" y="535478"/>
+            <a:ext cx="6185916" cy="3416320"/>
+          </a:xfrm>
+          <a:prstGeom prst="rect">
+            <a:avLst/>
+          </a:prstGeom>
+          <a:noFill/>
+        </p:spPr>
+        <p:txBody>
+          <a:bodyPr wrap="square">
+            <a:spAutoFit/>
+          </a:bodyPr>
+          <a:lstStyle/>
+          <a:p>
+            <a:r>
+              <a:rPr lang="en-US" sz="2400" dirty="0">
+                <a:solidFill>
+                  <a:schemeClr val="accent6">
+                    <a:lumMod val="60000"/>
+                    <a:lumOff val="40000"/>
+                  </a:schemeClr>
+                </a:solidFill>
+              </a:rPr>
+              <a:t>4. Bounding Box Regression</a:t>
+            </a:r>
+          </a:p>
+          <a:p>
+            <a:r>
+              <a:rPr lang="en-US" sz="2400" dirty="0">
+                <a:solidFill>
+                  <a:schemeClr val="accent6">
+                    <a:lumMod val="60000"/>
+                    <a:lumOff val="40000"/>
+                  </a:schemeClr>
+                </a:solidFill>
+              </a:rPr>
+              <a:t>A class-specific bounding box regressor refines the coordinates.</a:t>
+            </a:r>
+          </a:p>
+          <a:p>
+            <a:endParaRPr lang="en-US" sz="2400" dirty="0">
+              <a:solidFill>
+                <a:schemeClr val="accent6">
+                  <a:lumMod val="60000"/>
+                  <a:lumOff val="40000"/>
+                </a:schemeClr>
+              </a:solidFill>
+            </a:endParaRPr>
+          </a:p>
+          <a:p>
+            <a:endParaRPr lang="en-US" sz="2400" dirty="0">
+              <a:solidFill>
+                <a:schemeClr val="accent6">
+                  <a:lumMod val="60000"/>
+                  <a:lumOff val="40000"/>
+                </a:schemeClr>
+              </a:solidFill>
+            </a:endParaRPr>
+          </a:p>
+          <a:p>
+            <a:endParaRPr lang="en-US" sz="2400" dirty="0">
+              <a:solidFill>
+                <a:schemeClr val="accent6">
+                  <a:lumMod val="60000"/>
+                  <a:lumOff val="40000"/>
+                </a:schemeClr>
+              </a:solidFill>
+            </a:endParaRPr>
+          </a:p>
+          <a:p>
+            <a:r>
+              <a:rPr lang="en-US" sz="2400" dirty="0">
+                <a:solidFill>
+                  <a:schemeClr val="accent6">
+                    <a:lumMod val="60000"/>
+                    <a:lumOff val="40000"/>
+                  </a:schemeClr>
+                </a:solidFill>
+              </a:rPr>
+              <a:t>5. Non-Maximum Suppression</a:t>
+            </a:r>
+          </a:p>
+          <a:p>
+            <a:r>
+              <a:rPr lang="en-US" sz="2400" dirty="0">
+                <a:solidFill>
+                  <a:schemeClr val="accent6">
+                    <a:lumMod val="60000"/>
+                    <a:lumOff val="40000"/>
+                  </a:schemeClr>
+                </a:solidFill>
+              </a:rPr>
+              <a:t>Keeps the box with highest confidence and removes overlapping ones.</a:t>
+            </a:r>
+          </a:p>
+        </p:txBody>
+      </p:sp>
+      <p:pic>
+        <p:nvPicPr>
+          <p:cNvPr id="6" name="Picture 5">
+            <a:extLst>
+              <a:ext uri="{FF2B5EF4-FFF2-40B4-BE49-F238E27FC236}">
+                <a16:creationId xmlns:a16="http://schemas.microsoft.com/office/drawing/2014/main" id="{AEF37E3D-FD9A-A725-13FD-758625C0CAE7}"/>
+              </a:ext>
+            </a:extLst>
+          </p:cNvPr>
+          <p:cNvPicPr>
+            <a:picLocks noChangeAspect="1"/>
+          </p:cNvPicPr>
+          <p:nvPr/>
+        </p:nvPicPr>
+        <p:blipFill>
+          <a:blip r:embed="rId2"/>
+          <a:stretch>
+            <a:fillRect/>
+          </a:stretch>
+        </p:blipFill>
+        <p:spPr>
+          <a:xfrm>
+            <a:off x="5922243" y="1261871"/>
+            <a:ext cx="6164869" cy="4716125"/>
+          </a:xfrm>
+          <a:prstGeom prst="rect">
+            <a:avLst/>
+          </a:prstGeom>
+        </p:spPr>
+      </p:pic>
+      <p:sp>
+        <p:nvSpPr>
+          <p:cNvPr id="7" name="TextBox 6">
+            <a:extLst>
+              <a:ext uri="{FF2B5EF4-FFF2-40B4-BE49-F238E27FC236}">
+                <a16:creationId xmlns:a16="http://schemas.microsoft.com/office/drawing/2014/main" id="{C79BE874-8623-DDCB-1914-E5EF159BB8F6}"/>
+              </a:ext>
+            </a:extLst>
+          </p:cNvPr>
+          <p:cNvSpPr txBox="1"/>
+          <p:nvPr/>
+        </p:nvSpPr>
+        <p:spPr>
+          <a:xfrm>
+            <a:off x="8330184" y="880004"/>
+            <a:ext cx="1732975" cy="369332"/>
+          </a:xfrm>
+          <a:prstGeom prst="rect">
+            <a:avLst/>
+          </a:prstGeom>
+          <a:noFill/>
+        </p:spPr>
+        <p:txBody>
+          <a:bodyPr wrap="none" rtlCol="0">
+            <a:spAutoFit/>
+          </a:bodyPr>
+          <a:lstStyle/>
+          <a:p>
+            <a:r>
+              <a:rPr lang="en-US" dirty="0">
+                <a:solidFill>
+                  <a:schemeClr val="accent6">
+                    <a:lumMod val="60000"/>
+                    <a:lumOff val="40000"/>
+                  </a:schemeClr>
+                </a:solidFill>
+              </a:rPr>
+              <a:t>Source: Medium</a:t>
+            </a:r>
+          </a:p>
+        </p:txBody>
+      </p:sp>
+    </p:spTree>
+    <p:extLst>
+      <p:ext uri="{BB962C8B-B14F-4D97-AF65-F5344CB8AC3E}">
+        <p14:creationId xmlns:p14="http://schemas.microsoft.com/office/powerpoint/2010/main" val="2502768764"/>
+      </p:ext>
+    </p:extLst>
+  </p:cSld>
+  <p:clrMapOvr>
+    <a:masterClrMapping/>
+  </p:clrMapOvr>
+</p:sld>
+</file>
+
+<file path=ppt/slides/slide7.xml><?xml version="1.0" encoding="utf-8"?>
+<p:sld xmlns:a="http://schemas.openxmlformats.org/drawingml/2006/main" xmlns:r="http://schemas.openxmlformats.org/officeDocument/2006/relationships" xmlns:p="http://schemas.openxmlformats.org/presentationml/2006/main">
+  <p:cSld>
+    <p:spTree>
+      <p:nvGrpSpPr>
+        <p:cNvPr id="1" name="">
+          <a:extLst>
+            <a:ext uri="{FF2B5EF4-FFF2-40B4-BE49-F238E27FC236}">
+              <a16:creationId xmlns:a16="http://schemas.microsoft.com/office/drawing/2014/main" id="{909E779B-A5BD-86EA-527E-80F44EC3CF96}"/>
+            </a:ext>
+          </a:extLst>
+        </p:cNvPr>
+        <p:cNvGrpSpPr/>
+        <p:nvPr/>
+      </p:nvGrpSpPr>
+      <p:grpSpPr>
+        <a:xfrm>
+          <a:off x="0" y="0"/>
+          <a:ext cx="0" cy="0"/>
+          <a:chOff x="0" y="0"/>
+          <a:chExt cx="0" cy="0"/>
+        </a:xfrm>
+      </p:grpSpPr>
+      <p:sp>
+        <p:nvSpPr>
+          <p:cNvPr id="4" name="TextBox 3">
+            <a:extLst>
+              <a:ext uri="{FF2B5EF4-FFF2-40B4-BE49-F238E27FC236}">
+                <a16:creationId xmlns:a16="http://schemas.microsoft.com/office/drawing/2014/main" id="{857A28FD-43DA-AABF-D553-91ED407D24A8}"/>
+              </a:ext>
+            </a:extLst>
+          </p:cNvPr>
+          <p:cNvSpPr txBox="1"/>
+          <p:nvPr/>
+        </p:nvSpPr>
+        <p:spPr>
+          <a:xfrm>
+            <a:off x="260604" y="73813"/>
+            <a:ext cx="8453628" cy="461665"/>
+          </a:xfrm>
+          <a:prstGeom prst="rect">
+            <a:avLst/>
+          </a:prstGeom>
+          <a:noFill/>
+        </p:spPr>
+        <p:txBody>
+          <a:bodyPr wrap="square">
+            <a:spAutoFit/>
+          </a:bodyPr>
+          <a:lstStyle/>
+          <a:p>
+            <a:r>
+              <a:rPr lang="en-US" sz="2400" b="1" dirty="0">
+                <a:solidFill>
+                  <a:schemeClr val="accent6">
+                    <a:lumMod val="60000"/>
+                    <a:lumOff val="40000"/>
+                  </a:schemeClr>
+                </a:solidFill>
+              </a:rPr>
+              <a:t>1. R-CNN (In detail)</a:t>
+            </a:r>
+          </a:p>
+        </p:txBody>
+      </p:sp>
+      <p:sp>
+        <p:nvSpPr>
+          <p:cNvPr id="5" name="TextBox 4">
+            <a:extLst>
+              <a:ext uri="{FF2B5EF4-FFF2-40B4-BE49-F238E27FC236}">
+                <a16:creationId xmlns:a16="http://schemas.microsoft.com/office/drawing/2014/main" id="{89281FAC-587C-579D-B3F0-403C4B45CAEF}"/>
+              </a:ext>
+            </a:extLst>
+          </p:cNvPr>
+          <p:cNvSpPr txBox="1"/>
+          <p:nvPr/>
+        </p:nvSpPr>
+        <p:spPr>
+          <a:xfrm>
+            <a:off x="397764" y="1366903"/>
+            <a:ext cx="5783580" cy="2677656"/>
+          </a:xfrm>
+          <a:prstGeom prst="rect">
+            <a:avLst/>
+          </a:prstGeom>
+          <a:noFill/>
+        </p:spPr>
+        <p:txBody>
+          <a:bodyPr wrap="square">
+            <a:spAutoFit/>
+          </a:bodyPr>
+          <a:lstStyle/>
+          <a:p>
+            <a:pPr>
+              <a:buNone/>
+            </a:pPr>
+            <a:r>
+              <a:rPr lang="en-US" sz="2400" b="1" dirty="0">
+                <a:solidFill>
+                  <a:schemeClr val="accent6">
+                    <a:lumMod val="60000"/>
+                    <a:lumOff val="40000"/>
+                  </a:schemeClr>
+                </a:solidFill>
+              </a:rPr>
+              <a:t>Big drawback of R-CNN:</a:t>
+            </a:r>
+            <a:endParaRPr lang="en-US" sz="2400" dirty="0">
+              <a:solidFill>
+                <a:schemeClr val="accent6">
+                  <a:lumMod val="60000"/>
+                  <a:lumOff val="40000"/>
+                </a:schemeClr>
+              </a:solidFill>
+            </a:endParaRPr>
+          </a:p>
+          <a:p>
+            <a:pPr marL="342900" indent="-342900">
+              <a:buFont typeface="Arial" panose="020B0604020202020204" pitchFamily="34" charset="0"/>
+              <a:buChar char="•"/>
+            </a:pPr>
+            <a:r>
+              <a:rPr lang="en-US" sz="2400" dirty="0">
+                <a:solidFill>
+                  <a:schemeClr val="accent6">
+                    <a:lumMod val="60000"/>
+                    <a:lumOff val="40000"/>
+                  </a:schemeClr>
+                </a:solidFill>
+              </a:rPr>
+              <a:t>CNN is run </a:t>
+            </a:r>
+            <a:r>
+              <a:rPr lang="en-US" sz="2400" b="1" dirty="0">
+                <a:solidFill>
+                  <a:schemeClr val="accent6">
+                    <a:lumMod val="60000"/>
+                    <a:lumOff val="40000"/>
+                  </a:schemeClr>
+                </a:solidFill>
+              </a:rPr>
+              <a:t>2000 times per image</a:t>
+            </a:r>
+            <a:r>
+              <a:rPr lang="en-US" sz="2400" dirty="0">
+                <a:solidFill>
+                  <a:schemeClr val="accent6">
+                    <a:lumMod val="60000"/>
+                    <a:lumOff val="40000"/>
+                  </a:schemeClr>
+                </a:solidFill>
+              </a:rPr>
+              <a:t> </a:t>
+            </a:r>
+          </a:p>
+          <a:p>
+            <a:pPr marL="342900" indent="-342900">
+              <a:buFont typeface="Arial" panose="020B0604020202020204" pitchFamily="34" charset="0"/>
+              <a:buChar char="•"/>
+            </a:pPr>
+            <a:r>
+              <a:rPr lang="en-US" sz="2400" dirty="0">
+                <a:solidFill>
+                  <a:schemeClr val="accent6">
+                    <a:lumMod val="60000"/>
+                    <a:lumOff val="40000"/>
+                  </a:schemeClr>
+                </a:solidFill>
+              </a:rPr>
+              <a:t>Very slow (not practical for real-time) </a:t>
+            </a:r>
+          </a:p>
+          <a:p>
+            <a:pPr>
+              <a:buNone/>
+            </a:pPr>
+            <a:endParaRPr lang="en-US" sz="2400" dirty="0">
+              <a:solidFill>
+                <a:schemeClr val="accent6">
+                  <a:lumMod val="60000"/>
+                  <a:lumOff val="40000"/>
+                </a:schemeClr>
+              </a:solidFill>
+            </a:endParaRPr>
+          </a:p>
+          <a:p>
+            <a:pPr>
+              <a:buNone/>
+            </a:pPr>
+            <a:r>
+              <a:rPr lang="en-US" sz="2400" dirty="0">
+                <a:solidFill>
+                  <a:schemeClr val="accent6">
+                    <a:lumMod val="60000"/>
+                    <a:lumOff val="40000"/>
+                  </a:schemeClr>
+                </a:solidFill>
+              </a:rPr>
+              <a:t>This motivates :</a:t>
+            </a:r>
+          </a:p>
+          <a:p>
+            <a:pPr marL="342900" indent="-342900">
+              <a:buFont typeface="Arial" panose="020B0604020202020204" pitchFamily="34" charset="0"/>
+              <a:buChar char="•"/>
+            </a:pPr>
+            <a:r>
+              <a:rPr lang="en-US" sz="2400" b="1" dirty="0">
+                <a:solidFill>
+                  <a:schemeClr val="accent6">
+                    <a:lumMod val="60000"/>
+                    <a:lumOff val="40000"/>
+                  </a:schemeClr>
+                </a:solidFill>
+              </a:rPr>
+              <a:t>Fast R-CNN</a:t>
+            </a:r>
+            <a:r>
+              <a:rPr lang="en-US" sz="2400" dirty="0">
+                <a:solidFill>
+                  <a:schemeClr val="accent6">
+                    <a:lumMod val="60000"/>
+                    <a:lumOff val="40000"/>
+                  </a:schemeClr>
+                </a:solidFill>
+              </a:rPr>
+              <a:t> </a:t>
+            </a:r>
+          </a:p>
+          <a:p>
+            <a:pPr marL="342900" indent="-342900">
+              <a:buFont typeface="Arial" panose="020B0604020202020204" pitchFamily="34" charset="0"/>
+              <a:buChar char="•"/>
+            </a:pPr>
+            <a:r>
+              <a:rPr lang="en-US" sz="2400" b="1" dirty="0">
+                <a:solidFill>
+                  <a:schemeClr val="accent6">
+                    <a:lumMod val="60000"/>
+                    <a:lumOff val="40000"/>
+                  </a:schemeClr>
+                </a:solidFill>
+              </a:rPr>
+              <a:t>Faster R-CNN</a:t>
+            </a:r>
+            <a:endParaRPr lang="en-US" sz="2400" dirty="0">
+              <a:solidFill>
+                <a:schemeClr val="accent6">
+                  <a:lumMod val="60000"/>
+                  <a:lumOff val="40000"/>
+                </a:schemeClr>
+              </a:solidFill>
+            </a:endParaRPr>
+          </a:p>
+        </p:txBody>
+      </p:sp>
+    </p:spTree>
+    <p:extLst>
+      <p:ext uri="{BB962C8B-B14F-4D97-AF65-F5344CB8AC3E}">
+        <p14:creationId xmlns:p14="http://schemas.microsoft.com/office/powerpoint/2010/main" val="2394958503"/>
+      </p:ext>
+    </p:extLst>
+  </p:cSld>
+  <p:clrMapOvr>
+    <a:masterClrMapping/>
+  </p:clrMapOvr>
+</p:sld>
+</file>
+
+<file path=ppt/slides/slide8.xml><?xml version="1.0" encoding="utf-8"?>
+<p:sld xmlns:a="http://schemas.openxmlformats.org/drawingml/2006/main" xmlns:r="http://schemas.openxmlformats.org/officeDocument/2006/relationships" xmlns:p="http://schemas.openxmlformats.org/presentationml/2006/main">
+  <p:cSld>
+    <p:spTree>
+      <p:nvGrpSpPr>
+        <p:cNvPr id="1" name="">
+          <a:extLst>
+            <a:ext uri="{FF2B5EF4-FFF2-40B4-BE49-F238E27FC236}">
+              <a16:creationId xmlns:a16="http://schemas.microsoft.com/office/drawing/2014/main" id="{93A43C8F-CE14-8FC5-AFCE-AFA6EE9C6778}"/>
+            </a:ext>
+          </a:extLst>
+        </p:cNvPr>
+        <p:cNvGrpSpPr/>
+        <p:nvPr/>
+      </p:nvGrpSpPr>
+      <p:grpSpPr>
+        <a:xfrm>
+          <a:off x="0" y="0"/>
+          <a:ext cx="0" cy="0"/>
+          <a:chOff x="0" y="0"/>
+          <a:chExt cx="0" cy="0"/>
+        </a:xfrm>
+      </p:grpSpPr>
+      <p:sp>
+        <p:nvSpPr>
+          <p:cNvPr id="4" name="TextBox 3">
+            <a:extLst>
+              <a:ext uri="{FF2B5EF4-FFF2-40B4-BE49-F238E27FC236}">
+                <a16:creationId xmlns:a16="http://schemas.microsoft.com/office/drawing/2014/main" id="{BB2D91BC-43B4-25D5-77DD-436A13A0918C}"/>
+              </a:ext>
+            </a:extLst>
+          </p:cNvPr>
+          <p:cNvSpPr txBox="1"/>
+          <p:nvPr/>
+        </p:nvSpPr>
+        <p:spPr>
+          <a:xfrm>
+            <a:off x="260604" y="73813"/>
+            <a:ext cx="7822692" cy="1200329"/>
+          </a:xfrm>
+          <a:prstGeom prst="rect">
+            <a:avLst/>
+          </a:prstGeom>
+          <a:noFill/>
+        </p:spPr>
+        <p:txBody>
+          <a:bodyPr wrap="square">
+            <a:spAutoFit/>
+          </a:bodyPr>
+          <a:lstStyle/>
+          <a:p>
+            <a:r>
+              <a:rPr lang="en-US" sz="2400" b="1" dirty="0">
+                <a:solidFill>
+                  <a:schemeClr val="accent6">
+                    <a:lumMod val="60000"/>
+                    <a:lumOff val="40000"/>
+                  </a:schemeClr>
+                </a:solidFill>
+              </a:rPr>
+              <a:t>2. Fast R-CNN</a:t>
+            </a:r>
+          </a:p>
+          <a:p>
+            <a:endParaRPr lang="en-US" sz="2400" b="1" dirty="0">
+              <a:solidFill>
+                <a:schemeClr val="accent6">
+                  <a:lumMod val="60000"/>
+                  <a:lumOff val="40000"/>
+                </a:schemeClr>
+              </a:solidFill>
+            </a:endParaRPr>
+          </a:p>
+          <a:p>
+            <a:pPr marL="342900" indent="-342900">
+              <a:buFont typeface="Arial" panose="020B0604020202020204" pitchFamily="34" charset="0"/>
+              <a:buChar char="•"/>
+            </a:pPr>
+            <a:r>
+              <a:rPr lang="en-US" sz="2400" dirty="0">
+                <a:solidFill>
+                  <a:schemeClr val="accent6">
+                    <a:lumMod val="60000"/>
+                    <a:lumOff val="40000"/>
+                  </a:schemeClr>
+                </a:solidFill>
+              </a:rPr>
+              <a:t>Improves R-CNN (no repeated CNN per region) </a:t>
+            </a:r>
+          </a:p>
+        </p:txBody>
+      </p:sp>
+      <p:sp>
+        <p:nvSpPr>
+          <p:cNvPr id="2" name="TextBox 1">
+            <a:extLst>
+              <a:ext uri="{FF2B5EF4-FFF2-40B4-BE49-F238E27FC236}">
+                <a16:creationId xmlns:a16="http://schemas.microsoft.com/office/drawing/2014/main" id="{E4F5E6EA-9BFE-5BFA-6ED4-7211A14BA083}"/>
+              </a:ext>
+            </a:extLst>
+          </p:cNvPr>
+          <p:cNvSpPr txBox="1"/>
+          <p:nvPr/>
+        </p:nvSpPr>
+        <p:spPr>
+          <a:xfrm>
+            <a:off x="260604" y="2688997"/>
+            <a:ext cx="7822692" cy="1569660"/>
+          </a:xfrm>
+          <a:prstGeom prst="rect">
+            <a:avLst/>
+          </a:prstGeom>
+          <a:noFill/>
+        </p:spPr>
+        <p:txBody>
+          <a:bodyPr wrap="square">
+            <a:spAutoFit/>
+          </a:bodyPr>
+          <a:lstStyle/>
+          <a:p>
+            <a:r>
+              <a:rPr lang="en-US" sz="2400" b="1" dirty="0">
+                <a:solidFill>
+                  <a:schemeClr val="accent6">
+                    <a:lumMod val="60000"/>
+                    <a:lumOff val="40000"/>
+                  </a:schemeClr>
+                </a:solidFill>
+              </a:rPr>
+              <a:t>3. Faster R-CNN</a:t>
+            </a:r>
+          </a:p>
+          <a:p>
+            <a:endParaRPr lang="en-US" sz="2400" b="1" dirty="0">
+              <a:solidFill>
+                <a:schemeClr val="accent6">
+                  <a:lumMod val="60000"/>
+                  <a:lumOff val="40000"/>
+                </a:schemeClr>
+              </a:solidFill>
+            </a:endParaRPr>
+          </a:p>
+          <a:p>
+            <a:pPr marL="342900" indent="-342900">
+              <a:buFont typeface="Arial" panose="020B0604020202020204" pitchFamily="34" charset="0"/>
+              <a:buChar char="•"/>
+            </a:pPr>
+            <a:r>
+              <a:rPr lang="en-US" sz="2400" dirty="0">
+                <a:solidFill>
+                  <a:schemeClr val="accent6">
+                    <a:lumMod val="60000"/>
+                    <a:lumOff val="40000"/>
+                  </a:schemeClr>
+                </a:solidFill>
+              </a:rPr>
+              <a:t>Adds Region Proposal Network (RPN) </a:t>
+            </a:r>
+          </a:p>
+          <a:p>
+            <a:pPr marL="342900" indent="-342900">
+              <a:buFont typeface="Arial" panose="020B0604020202020204" pitchFamily="34" charset="0"/>
+              <a:buChar char="•"/>
+            </a:pPr>
+            <a:r>
+              <a:rPr lang="en-US" sz="2400" dirty="0">
+                <a:solidFill>
+                  <a:schemeClr val="accent6">
+                    <a:lumMod val="60000"/>
+                    <a:lumOff val="40000"/>
+                  </a:schemeClr>
+                </a:solidFill>
+              </a:rPr>
+              <a:t>Slightly more complex but logical extension </a:t>
+            </a:r>
+          </a:p>
+        </p:txBody>
+      </p:sp>
+    </p:spTree>
+    <p:extLst>
+      <p:ext uri="{BB962C8B-B14F-4D97-AF65-F5344CB8AC3E}">
+        <p14:creationId xmlns:p14="http://schemas.microsoft.com/office/powerpoint/2010/main" val="154926476"/>
+      </p:ext>
+    </p:extLst>
+  </p:cSld>
+  <p:clrMapOvr>
+    <a:masterClrMapping/>
+  </p:clrMapOvr>
+</p:sld>
+</file>
+
+<file path=ppt/slides/slide9.xml><?xml version="1.0" encoding="utf-8"?>
+<p:sld xmlns:a="http://schemas.openxmlformats.org/drawingml/2006/main" xmlns:r="http://schemas.openxmlformats.org/officeDocument/2006/relationships" xmlns:p="http://schemas.openxmlformats.org/presentationml/2006/main">
+  <p:cSld>
+    <p:spTree>
+      <p:nvGrpSpPr>
+        <p:cNvPr id="1" name="">
+          <a:extLst>
+            <a:ext uri="{FF2B5EF4-FFF2-40B4-BE49-F238E27FC236}">
+              <a16:creationId xmlns:a16="http://schemas.microsoft.com/office/drawing/2014/main" id="{DF8A4539-2D0C-7E1F-C1D9-884492AA92F3}"/>
+            </a:ext>
+          </a:extLst>
+        </p:cNvPr>
+        <p:cNvGrpSpPr/>
+        <p:nvPr/>
+      </p:nvGrpSpPr>
+      <p:grpSpPr>
+        <a:xfrm>
+          <a:off x="0" y="0"/>
+          <a:ext cx="0" cy="0"/>
+          <a:chOff x="0" y="0"/>
+          <a:chExt cx="0" cy="0"/>
+        </a:xfrm>
+      </p:grpSpPr>
+      <p:sp>
+        <p:nvSpPr>
+          <p:cNvPr id="4" name="TextBox 3">
+            <a:extLst>
+              <a:ext uri="{FF2B5EF4-FFF2-40B4-BE49-F238E27FC236}">
+                <a16:creationId xmlns:a16="http://schemas.microsoft.com/office/drawing/2014/main" id="{3839E7FD-E00B-B9B7-8310-34A3B768E83E}"/>
+              </a:ext>
+            </a:extLst>
+          </p:cNvPr>
+          <p:cNvSpPr txBox="1"/>
+          <p:nvPr/>
+        </p:nvSpPr>
+        <p:spPr>
+          <a:xfrm>
+            <a:off x="260604" y="73813"/>
+            <a:ext cx="7822692" cy="2308324"/>
+          </a:xfrm>
+          <a:prstGeom prst="rect">
+            <a:avLst/>
+          </a:prstGeom>
+          <a:noFill/>
+        </p:spPr>
+        <p:txBody>
+          <a:bodyPr wrap="square">
+            <a:spAutoFit/>
+          </a:bodyPr>
+          <a:lstStyle/>
+          <a:p>
+            <a:r>
+              <a:rPr lang="en-US" sz="2400" b="1" dirty="0">
+                <a:solidFill>
+                  <a:schemeClr val="accent6">
+                    <a:lumMod val="60000"/>
+                    <a:lumOff val="40000"/>
+                  </a:schemeClr>
+                </a:solidFill>
+              </a:rPr>
+              <a:t>4. YOLO (You Only Look Once)</a:t>
+            </a:r>
+          </a:p>
+          <a:p>
+            <a:endParaRPr lang="en-US" sz="2400" b="1" dirty="0">
+              <a:solidFill>
+                <a:schemeClr val="accent6">
+                  <a:lumMod val="60000"/>
+                  <a:lumOff val="40000"/>
+                </a:schemeClr>
+              </a:solidFill>
+            </a:endParaRPr>
+          </a:p>
+          <a:p>
+            <a:r>
+              <a:rPr lang="en-US" sz="2400" dirty="0">
+                <a:solidFill>
+                  <a:schemeClr val="accent6">
+                    <a:lumMod val="60000"/>
+                    <a:lumOff val="40000"/>
+                  </a:schemeClr>
+                </a:solidFill>
+              </a:rPr>
+              <a:t>Entire image → single pass → predicts everything </a:t>
+            </a:r>
+          </a:p>
+          <a:p>
+            <a:endParaRPr lang="en-US" sz="2400" dirty="0">
+              <a:solidFill>
+                <a:schemeClr val="accent6">
+                  <a:lumMod val="60000"/>
+                  <a:lumOff val="40000"/>
+                </a:schemeClr>
+              </a:solidFill>
+            </a:endParaRPr>
+          </a:p>
+          <a:p>
+            <a:r>
+              <a:rPr lang="en-US" sz="2400" dirty="0">
+                <a:solidFill>
+                  <a:schemeClr val="accent6">
+                    <a:lumMod val="60000"/>
+                    <a:lumOff val="40000"/>
+                  </a:schemeClr>
+                </a:solidFill>
+              </a:rPr>
+              <a:t>Think: “one shot detection” </a:t>
+            </a:r>
+          </a:p>
+          <a:p>
+            <a:r>
+              <a:rPr lang="en-US" sz="2400" dirty="0">
+                <a:solidFill>
+                  <a:schemeClr val="accent6">
+                    <a:lumMod val="60000"/>
+                    <a:lumOff val="40000"/>
+                  </a:schemeClr>
+                </a:solidFill>
+              </a:rPr>
+              <a:t>👉 Harder conceptually (grid system, anchor boxes)</a:t>
+            </a:r>
+          </a:p>
+        </p:txBody>
+      </p:sp>
+    </p:spTree>
+    <p:extLst>
+      <p:ext uri="{BB962C8B-B14F-4D97-AF65-F5344CB8AC3E}">
+        <p14:creationId xmlns:p14="http://schemas.microsoft.com/office/powerpoint/2010/main" val="535229357"/>
       </p:ext>
     </p:extLst>
   </p:cSld>
